--- a/5013/01 September 2025/Presentations/01 Week.pptx
+++ b/5013/01 September 2025/Presentations/01 Week.pptx
@@ -5,7 +5,7 @@
     <p:sldMasterId id="2147483648" r:id="rId1"/>
   </p:sldMasterIdLst>
   <p:notesMasterIdLst>
-    <p:notesMasterId r:id="rId20"/>
+    <p:notesMasterId r:id="rId25"/>
   </p:notesMasterIdLst>
   <p:sldIdLst>
     <p:sldId id="256" r:id="rId2"/>
@@ -15,17 +15,22 @@
     <p:sldId id="260" r:id="rId6"/>
     <p:sldId id="261" r:id="rId7"/>
     <p:sldId id="262" r:id="rId8"/>
-    <p:sldId id="263" r:id="rId9"/>
-    <p:sldId id="264" r:id="rId10"/>
-    <p:sldId id="265" r:id="rId11"/>
-    <p:sldId id="266" r:id="rId12"/>
-    <p:sldId id="267" r:id="rId13"/>
-    <p:sldId id="268" r:id="rId14"/>
-    <p:sldId id="269" r:id="rId15"/>
-    <p:sldId id="270" r:id="rId16"/>
-    <p:sldId id="271" r:id="rId17"/>
-    <p:sldId id="272" r:id="rId18"/>
-    <p:sldId id="273" r:id="rId19"/>
+    <p:sldId id="274" r:id="rId9"/>
+    <p:sldId id="275" r:id="rId10"/>
+    <p:sldId id="263" r:id="rId11"/>
+    <p:sldId id="276" r:id="rId12"/>
+    <p:sldId id="278" r:id="rId13"/>
+    <p:sldId id="277" r:id="rId14"/>
+    <p:sldId id="264" r:id="rId15"/>
+    <p:sldId id="265" r:id="rId16"/>
+    <p:sldId id="266" r:id="rId17"/>
+    <p:sldId id="267" r:id="rId18"/>
+    <p:sldId id="268" r:id="rId19"/>
+    <p:sldId id="269" r:id="rId20"/>
+    <p:sldId id="270" r:id="rId21"/>
+    <p:sldId id="271" r:id="rId22"/>
+    <p:sldId id="272" r:id="rId23"/>
+    <p:sldId id="273" r:id="rId24"/>
   </p:sldIdLst>
   <p:sldSz cx="12192000" cy="6858000"/>
   <p:notesSz cx="6858000" cy="9144000"/>
@@ -124,6 +129,11 @@
       </a:defRPr>
     </a:lvl9pPr>
   </p:defaultTextStyle>
+  <p:extLst>
+    <p:ext uri="{EFAFB233-063F-42B5-8137-9DF3F51BA10A}">
+      <p15:sldGuideLst xmlns:p15="http://schemas.microsoft.com/office/powerpoint/2012/main"/>
+    </p:ext>
+  </p:extLst>
 </p:presentation>
 </file>
 
@@ -25258,6 +25268,90 @@
           <a:bodyPr/>
           <a:lstStyle/>
           <a:p>
+            <a:endParaRPr lang="en-AE" dirty="0"/>
+          </a:p>
+        </p:txBody>
+      </p:sp>
+      <p:sp>
+        <p:nvSpPr>
+          <p:cNvPr id="4" name="Slide Number Placeholder 3"/>
+          <p:cNvSpPr>
+            <a:spLocks noGrp="1"/>
+          </p:cNvSpPr>
+          <p:nvPr>
+            <p:ph type="sldNum" sz="quarter" idx="5"/>
+          </p:nvPr>
+        </p:nvSpPr>
+        <p:spPr/>
+        <p:txBody>
+          <a:bodyPr/>
+          <a:lstStyle/>
+          <a:p>
+            <a:fld id="{47BD8EF4-9948-40AE-9152-8FDBB9DB55E2}" type="slidenum">
+              <a:rPr lang="en-AE" smtClean="0"/>
+              <a:t>20</a:t>
+            </a:fld>
+            <a:endParaRPr lang="en-AE"/>
+          </a:p>
+        </p:txBody>
+      </p:sp>
+    </p:spTree>
+    <p:extLst>
+      <p:ext uri="{BB962C8B-B14F-4D97-AF65-F5344CB8AC3E}">
+        <p14:creationId xmlns:p14="http://schemas.microsoft.com/office/powerpoint/2010/main" val="3279732277"/>
+      </p:ext>
+    </p:extLst>
+  </p:cSld>
+  <p:clrMapOvr>
+    <a:masterClrMapping/>
+  </p:clrMapOvr>
+</p:notes>
+</file>
+
+<file path=ppt/notesSlides/notesSlide11.xml><?xml version="1.0" encoding="utf-8"?>
+<p:notes xmlns:a="http://schemas.openxmlformats.org/drawingml/2006/main" xmlns:r="http://schemas.openxmlformats.org/officeDocument/2006/relationships" xmlns:p="http://schemas.openxmlformats.org/presentationml/2006/main">
+  <p:cSld>
+    <p:spTree>
+      <p:nvGrpSpPr>
+        <p:cNvPr id="1" name=""/>
+        <p:cNvGrpSpPr/>
+        <p:nvPr/>
+      </p:nvGrpSpPr>
+      <p:grpSpPr>
+        <a:xfrm>
+          <a:off x="0" y="0"/>
+          <a:ext cx="0" cy="0"/>
+          <a:chOff x="0" y="0"/>
+          <a:chExt cx="0" cy="0"/>
+        </a:xfrm>
+      </p:grpSpPr>
+      <p:sp>
+        <p:nvSpPr>
+          <p:cNvPr id="2" name="Slide Image Placeholder 1"/>
+          <p:cNvSpPr>
+            <a:spLocks noGrp="1" noRot="1" noChangeAspect="1"/>
+          </p:cNvSpPr>
+          <p:nvPr>
+            <p:ph type="sldImg"/>
+          </p:nvPr>
+        </p:nvSpPr>
+        <p:spPr/>
+      </p:sp>
+      <p:sp>
+        <p:nvSpPr>
+          <p:cNvPr id="3" name="Notes Placeholder 2"/>
+          <p:cNvSpPr>
+            <a:spLocks noGrp="1"/>
+          </p:cNvSpPr>
+          <p:nvPr>
+            <p:ph type="body" idx="1"/>
+          </p:nvPr>
+        </p:nvSpPr>
+        <p:spPr/>
+        <p:txBody>
+          <a:bodyPr/>
+          <a:lstStyle/>
+          <a:p>
             <a:pPr lvl="0"/>
             <a:r>
               <a:rPr lang="en-AE" sz="1200" b="0" i="0" kern="1200" dirty="0">
@@ -25297,7 +25391,7 @@
           <a:p>
             <a:fld id="{47BD8EF4-9948-40AE-9152-8FDBB9DB55E2}" type="slidenum">
               <a:rPr lang="en-AE" smtClean="0"/>
-              <a:t>16</a:t>
+              <a:t>21</a:t>
             </a:fld>
             <a:endParaRPr lang="en-AE"/>
           </a:p>
@@ -25584,7 +25678,7 @@
           <a:p>
             <a:fld id="{47BD8EF4-9948-40AE-9152-8FDBB9DB55E2}" type="slidenum">
               <a:rPr lang="en-AE" smtClean="0"/>
-              <a:t>8</a:t>
+              <a:t>10</a:t>
             </a:fld>
             <a:endParaRPr lang="en-AE"/>
           </a:p>
@@ -25668,7 +25762,91 @@
           <a:p>
             <a:fld id="{47BD8EF4-9948-40AE-9152-8FDBB9DB55E2}" type="slidenum">
               <a:rPr lang="en-AE" smtClean="0"/>
-              <a:t>9</a:t>
+              <a:t>13</a:t>
+            </a:fld>
+            <a:endParaRPr lang="en-AE"/>
+          </a:p>
+        </p:txBody>
+      </p:sp>
+    </p:spTree>
+    <p:extLst>
+      <p:ext uri="{BB962C8B-B14F-4D97-AF65-F5344CB8AC3E}">
+        <p14:creationId xmlns:p14="http://schemas.microsoft.com/office/powerpoint/2010/main" val="3621621069"/>
+      </p:ext>
+    </p:extLst>
+  </p:cSld>
+  <p:clrMapOvr>
+    <a:masterClrMapping/>
+  </p:clrMapOvr>
+</p:notes>
+</file>
+
+<file path=ppt/notesSlides/notesSlide6.xml><?xml version="1.0" encoding="utf-8"?>
+<p:notes xmlns:a="http://schemas.openxmlformats.org/drawingml/2006/main" xmlns:r="http://schemas.openxmlformats.org/officeDocument/2006/relationships" xmlns:p="http://schemas.openxmlformats.org/presentationml/2006/main">
+  <p:cSld>
+    <p:spTree>
+      <p:nvGrpSpPr>
+        <p:cNvPr id="1" name=""/>
+        <p:cNvGrpSpPr/>
+        <p:nvPr/>
+      </p:nvGrpSpPr>
+      <p:grpSpPr>
+        <a:xfrm>
+          <a:off x="0" y="0"/>
+          <a:ext cx="0" cy="0"/>
+          <a:chOff x="0" y="0"/>
+          <a:chExt cx="0" cy="0"/>
+        </a:xfrm>
+      </p:grpSpPr>
+      <p:sp>
+        <p:nvSpPr>
+          <p:cNvPr id="2" name="Slide Image Placeholder 1"/>
+          <p:cNvSpPr>
+            <a:spLocks noGrp="1" noRot="1" noChangeAspect="1"/>
+          </p:cNvSpPr>
+          <p:nvPr>
+            <p:ph type="sldImg"/>
+          </p:nvPr>
+        </p:nvSpPr>
+        <p:spPr/>
+      </p:sp>
+      <p:sp>
+        <p:nvSpPr>
+          <p:cNvPr id="3" name="Notes Placeholder 2"/>
+          <p:cNvSpPr>
+            <a:spLocks noGrp="1"/>
+          </p:cNvSpPr>
+          <p:nvPr>
+            <p:ph type="body" idx="1"/>
+          </p:nvPr>
+        </p:nvSpPr>
+        <p:spPr/>
+        <p:txBody>
+          <a:bodyPr/>
+          <a:lstStyle/>
+          <a:p>
+            <a:endParaRPr lang="en-AE" dirty="0"/>
+          </a:p>
+        </p:txBody>
+      </p:sp>
+      <p:sp>
+        <p:nvSpPr>
+          <p:cNvPr id="4" name="Slide Number Placeholder 3"/>
+          <p:cNvSpPr>
+            <a:spLocks noGrp="1"/>
+          </p:cNvSpPr>
+          <p:nvPr>
+            <p:ph type="sldNum" sz="quarter" idx="5"/>
+          </p:nvPr>
+        </p:nvSpPr>
+        <p:spPr/>
+        <p:txBody>
+          <a:bodyPr/>
+          <a:lstStyle/>
+          <a:p>
+            <a:fld id="{47BD8EF4-9948-40AE-9152-8FDBB9DB55E2}" type="slidenum">
+              <a:rPr lang="en-AE" smtClean="0"/>
+              <a:t>14</a:t>
             </a:fld>
             <a:endParaRPr lang="en-AE"/>
           </a:p>
@@ -25687,7 +25865,7 @@
 </p:notes>
 </file>
 
-<file path=ppt/notesSlides/notesSlide6.xml><?xml version="1.0" encoding="utf-8"?>
+<file path=ppt/notesSlides/notesSlide7.xml><?xml version="1.0" encoding="utf-8"?>
 <p:notes xmlns:a="http://schemas.openxmlformats.org/drawingml/2006/main" xmlns:r="http://schemas.openxmlformats.org/officeDocument/2006/relationships" xmlns:p="http://schemas.openxmlformats.org/presentationml/2006/main">
   <p:cSld>
     <p:spTree>
@@ -25782,7 +25960,7 @@
           <a:p>
             <a:fld id="{47BD8EF4-9948-40AE-9152-8FDBB9DB55E2}" type="slidenum">
               <a:rPr lang="en-AE" smtClean="0"/>
-              <a:t>12</a:t>
+              <a:t>17</a:t>
             </a:fld>
             <a:endParaRPr lang="en-AE"/>
           </a:p>
@@ -25792,90 +25970,6 @@
     <p:extLst>
       <p:ext uri="{BB962C8B-B14F-4D97-AF65-F5344CB8AC3E}">
         <p14:creationId xmlns:p14="http://schemas.microsoft.com/office/powerpoint/2010/main" val="2059861061"/>
-      </p:ext>
-    </p:extLst>
-  </p:cSld>
-  <p:clrMapOvr>
-    <a:masterClrMapping/>
-  </p:clrMapOvr>
-</p:notes>
-</file>
-
-<file path=ppt/notesSlides/notesSlide7.xml><?xml version="1.0" encoding="utf-8"?>
-<p:notes xmlns:a="http://schemas.openxmlformats.org/drawingml/2006/main" xmlns:r="http://schemas.openxmlformats.org/officeDocument/2006/relationships" xmlns:p="http://schemas.openxmlformats.org/presentationml/2006/main">
-  <p:cSld>
-    <p:spTree>
-      <p:nvGrpSpPr>
-        <p:cNvPr id="1" name=""/>
-        <p:cNvGrpSpPr/>
-        <p:nvPr/>
-      </p:nvGrpSpPr>
-      <p:grpSpPr>
-        <a:xfrm>
-          <a:off x="0" y="0"/>
-          <a:ext cx="0" cy="0"/>
-          <a:chOff x="0" y="0"/>
-          <a:chExt cx="0" cy="0"/>
-        </a:xfrm>
-      </p:grpSpPr>
-      <p:sp>
-        <p:nvSpPr>
-          <p:cNvPr id="2" name="Slide Image Placeholder 1"/>
-          <p:cNvSpPr>
-            <a:spLocks noGrp="1" noRot="1" noChangeAspect="1"/>
-          </p:cNvSpPr>
-          <p:nvPr>
-            <p:ph type="sldImg"/>
-          </p:nvPr>
-        </p:nvSpPr>
-        <p:spPr/>
-      </p:sp>
-      <p:sp>
-        <p:nvSpPr>
-          <p:cNvPr id="3" name="Notes Placeholder 2"/>
-          <p:cNvSpPr>
-            <a:spLocks noGrp="1"/>
-          </p:cNvSpPr>
-          <p:nvPr>
-            <p:ph type="body" idx="1"/>
-          </p:nvPr>
-        </p:nvSpPr>
-        <p:spPr/>
-        <p:txBody>
-          <a:bodyPr/>
-          <a:lstStyle/>
-          <a:p>
-            <a:endParaRPr lang="en-AE" dirty="0"/>
-          </a:p>
-        </p:txBody>
-      </p:sp>
-      <p:sp>
-        <p:nvSpPr>
-          <p:cNvPr id="4" name="Slide Number Placeholder 3"/>
-          <p:cNvSpPr>
-            <a:spLocks noGrp="1"/>
-          </p:cNvSpPr>
-          <p:nvPr>
-            <p:ph type="sldNum" sz="quarter" idx="5"/>
-          </p:nvPr>
-        </p:nvSpPr>
-        <p:spPr/>
-        <p:txBody>
-          <a:bodyPr/>
-          <a:lstStyle/>
-          <a:p>
-            <a:fld id="{47BD8EF4-9948-40AE-9152-8FDBB9DB55E2}" type="slidenum">
-              <a:rPr lang="en-AE" smtClean="0"/>
-              <a:t>13</a:t>
-            </a:fld>
-            <a:endParaRPr lang="en-AE"/>
-          </a:p>
-        </p:txBody>
-      </p:sp>
-    </p:spTree>
-    <p:extLst>
-      <p:ext uri="{BB962C8B-B14F-4D97-AF65-F5344CB8AC3E}">
-        <p14:creationId xmlns:p14="http://schemas.microsoft.com/office/powerpoint/2010/main" val="3154541850"/>
       </p:ext>
     </p:extLst>
   </p:cSld>
@@ -25950,7 +26044,7 @@
           <a:p>
             <a:fld id="{47BD8EF4-9948-40AE-9152-8FDBB9DB55E2}" type="slidenum">
               <a:rPr lang="en-AE" smtClean="0"/>
-              <a:t>14</a:t>
+              <a:t>18</a:t>
             </a:fld>
             <a:endParaRPr lang="en-AE"/>
           </a:p>
@@ -25959,7 +26053,7 @@
     </p:spTree>
     <p:extLst>
       <p:ext uri="{BB962C8B-B14F-4D97-AF65-F5344CB8AC3E}">
-        <p14:creationId xmlns:p14="http://schemas.microsoft.com/office/powerpoint/2010/main" val="4219581045"/>
+        <p14:creationId xmlns:p14="http://schemas.microsoft.com/office/powerpoint/2010/main" val="3154541850"/>
       </p:ext>
     </p:extLst>
   </p:cSld>
@@ -26034,7 +26128,7 @@
           <a:p>
             <a:fld id="{47BD8EF4-9948-40AE-9152-8FDBB9DB55E2}" type="slidenum">
               <a:rPr lang="en-AE" smtClean="0"/>
-              <a:t>15</a:t>
+              <a:t>19</a:t>
             </a:fld>
             <a:endParaRPr lang="en-AE"/>
           </a:p>
@@ -26043,7 +26137,7 @@
     </p:spTree>
     <p:extLst>
       <p:ext uri="{BB962C8B-B14F-4D97-AF65-F5344CB8AC3E}">
-        <p14:creationId xmlns:p14="http://schemas.microsoft.com/office/powerpoint/2010/main" val="3279732277"/>
+        <p14:creationId xmlns:p14="http://schemas.microsoft.com/office/powerpoint/2010/main" val="4219581045"/>
       </p:ext>
     </p:extLst>
   </p:cSld>
@@ -29479,6 +29573,1339 @@
 <file path=ppt/slides/slide10.xml><?xml version="1.0" encoding="utf-8"?>
 <p:sld xmlns:a="http://schemas.openxmlformats.org/drawingml/2006/main" xmlns:r="http://schemas.openxmlformats.org/officeDocument/2006/relationships" xmlns:p="http://schemas.openxmlformats.org/presentationml/2006/main">
   <p:cSld>
+    <p:bg>
+      <p:bgPr>
+        <a:solidFill>
+          <a:schemeClr val="bg1"/>
+        </a:solidFill>
+        <a:effectLst/>
+      </p:bgPr>
+    </p:bg>
+    <p:spTree>
+      <p:nvGrpSpPr>
+        <p:cNvPr id="1" name=""/>
+        <p:cNvGrpSpPr/>
+        <p:nvPr/>
+      </p:nvGrpSpPr>
+      <p:grpSpPr>
+        <a:xfrm>
+          <a:off x="0" y="0"/>
+          <a:ext cx="0" cy="0"/>
+          <a:chOff x="0" y="0"/>
+          <a:chExt cx="0" cy="0"/>
+        </a:xfrm>
+      </p:grpSpPr>
+      <p:sp useBgFill="1">
+        <p:nvSpPr>
+          <p:cNvPr id="9" name="Slide Background">
+            <a:extLst>
+              <a:ext uri="{FF2B5EF4-FFF2-40B4-BE49-F238E27FC236}">
+                <a16:creationId xmlns:a16="http://schemas.microsoft.com/office/drawing/2014/main" id="{3ECBE1F1-D69B-4AFA-ABD5-8E41720EF6DE}"/>
+              </a:ext>
+              <a:ext uri="{C183D7F6-B498-43B3-948B-1728B52AA6E4}">
+                <adec:decorative xmlns:adec="http://schemas.microsoft.com/office/drawing/2017/decorative" val="1"/>
+              </a:ext>
+            </a:extLst>
+          </p:cNvPr>
+          <p:cNvSpPr>
+            <a:spLocks noGrp="1" noRot="1" noChangeAspect="1" noMove="1" noResize="1" noEditPoints="1" noAdjustHandles="1" noChangeArrowheads="1" noChangeShapeType="1" noTextEdit="1"/>
+          </p:cNvSpPr>
+          <p:nvPr>
+            <p:extLst>
+              <p:ext uri="{386F3935-93C4-4BCD-93E2-E3B085C9AB24}">
+                <p16:designElem xmlns:p16="http://schemas.microsoft.com/office/powerpoint/2015/main" val="1"/>
+              </p:ext>
+            </p:extLst>
+          </p:nvPr>
+        </p:nvSpPr>
+        <p:spPr>
+          <a:xfrm>
+            <a:off x="0" y="0"/>
+            <a:ext cx="12192000" cy="6858000"/>
+          </a:xfrm>
+          <a:prstGeom prst="rect">
+            <a:avLst/>
+          </a:prstGeom>
+          <a:ln>
+            <a:noFill/>
+          </a:ln>
+        </p:spPr>
+        <p:style>
+          <a:lnRef idx="2">
+            <a:schemeClr val="accent1">
+              <a:shade val="50000"/>
+            </a:schemeClr>
+          </a:lnRef>
+          <a:fillRef idx="1">
+            <a:schemeClr val="accent1"/>
+          </a:fillRef>
+          <a:effectRef idx="0">
+            <a:schemeClr val="accent1"/>
+          </a:effectRef>
+          <a:fontRef idx="minor">
+            <a:schemeClr val="lt1"/>
+          </a:fontRef>
+        </p:style>
+        <p:txBody>
+          <a:bodyPr rtlCol="0" anchor="ctr"/>
+          <a:lstStyle/>
+          <a:p>
+            <a:pPr algn="ctr"/>
+            <a:endParaRPr lang="en-US"/>
+          </a:p>
+        </p:txBody>
+      </p:sp>
+      <p:pic>
+        <p:nvPicPr>
+          <p:cNvPr id="5" name="Picture 4" descr="Electronic circuit board with processor">
+            <a:extLst>
+              <a:ext uri="{FF2B5EF4-FFF2-40B4-BE49-F238E27FC236}">
+                <a16:creationId xmlns:a16="http://schemas.microsoft.com/office/drawing/2014/main" id="{15C5DD42-E6B4-45F5-AEF7-219505B31CA1}"/>
+              </a:ext>
+            </a:extLst>
+          </p:cNvPr>
+          <p:cNvPicPr>
+            <a:picLocks noChangeAspect="1"/>
+          </p:cNvPicPr>
+          <p:nvPr/>
+        </p:nvPicPr>
+        <p:blipFill>
+          <a:blip r:embed="rId3"/>
+          <a:srcRect l="35694" r="11647" b="-2"/>
+          <a:stretch>
+            <a:fillRect/>
+          </a:stretch>
+        </p:blipFill>
+        <p:spPr>
+          <a:xfrm>
+            <a:off x="-1" y="-2"/>
+            <a:ext cx="5410198" cy="6858002"/>
+          </a:xfrm>
+          <a:prstGeom prst="rect">
+            <a:avLst/>
+          </a:prstGeom>
+        </p:spPr>
+      </p:pic>
+      <p:sp useBgFill="1">
+        <p:nvSpPr>
+          <p:cNvPr id="11" name="Rectangle 10">
+            <a:extLst>
+              <a:ext uri="{FF2B5EF4-FFF2-40B4-BE49-F238E27FC236}">
+                <a16:creationId xmlns:a16="http://schemas.microsoft.com/office/drawing/2014/main" id="{603A6265-E10C-4B85-9C20-E75FCAF9CC63}"/>
+              </a:ext>
+              <a:ext uri="{C183D7F6-B498-43B3-948B-1728B52AA6E4}">
+                <adec:decorative xmlns:adec="http://schemas.microsoft.com/office/drawing/2017/decorative" val="1"/>
+              </a:ext>
+            </a:extLst>
+          </p:cNvPr>
+          <p:cNvSpPr>
+            <a:spLocks noGrp="1" noRot="1" noChangeAspect="1" noMove="1" noResize="1" noEditPoints="1" noAdjustHandles="1" noChangeArrowheads="1" noChangeShapeType="1" noTextEdit="1"/>
+          </p:cNvSpPr>
+          <p:nvPr>
+            <p:extLst>
+              <p:ext uri="{386F3935-93C4-4BCD-93E2-E3B085C9AB24}">
+                <p16:designElem xmlns:p16="http://schemas.microsoft.com/office/powerpoint/2015/main" val="1"/>
+              </p:ext>
+            </p:extLst>
+          </p:nvPr>
+        </p:nvSpPr>
+        <p:spPr>
+          <a:xfrm>
+            <a:off x="5410197" y="-1"/>
+            <a:ext cx="6781802" cy="2286000"/>
+          </a:xfrm>
+          <a:prstGeom prst="rect">
+            <a:avLst/>
+          </a:prstGeom>
+          <a:ln>
+            <a:noFill/>
+          </a:ln>
+          <a:effectLst>
+            <a:outerShdw blurRad="355600" dist="152400" sx="95000" sy="95000" algn="t" rotWithShape="0">
+              <a:srgbClr val="000000">
+                <a:alpha val="29000"/>
+              </a:srgbClr>
+            </a:outerShdw>
+          </a:effectLst>
+        </p:spPr>
+        <p:style>
+          <a:lnRef idx="2">
+            <a:schemeClr val="accent1">
+              <a:shade val="50000"/>
+            </a:schemeClr>
+          </a:lnRef>
+          <a:fillRef idx="1">
+            <a:schemeClr val="accent1"/>
+          </a:fillRef>
+          <a:effectRef idx="0">
+            <a:schemeClr val="accent1"/>
+          </a:effectRef>
+          <a:fontRef idx="minor">
+            <a:schemeClr val="lt1"/>
+          </a:fontRef>
+        </p:style>
+        <p:txBody>
+          <a:bodyPr rtlCol="0" anchor="ctr"/>
+          <a:lstStyle/>
+          <a:p>
+            <a:pPr algn="ctr"/>
+            <a:endParaRPr lang="en-US"/>
+          </a:p>
+        </p:txBody>
+      </p:sp>
+      <p:sp>
+        <p:nvSpPr>
+          <p:cNvPr id="2" name="Title 1">
+            <a:extLst>
+              <a:ext uri="{FF2B5EF4-FFF2-40B4-BE49-F238E27FC236}">
+                <a16:creationId xmlns:a16="http://schemas.microsoft.com/office/drawing/2014/main" id="{7BBFBE35-9AB0-EF5D-E279-A82FBB4988D4}"/>
+              </a:ext>
+            </a:extLst>
+          </p:cNvPr>
+          <p:cNvSpPr>
+            <a:spLocks noGrp="1"/>
+          </p:cNvSpPr>
+          <p:nvPr>
+            <p:ph type="title"/>
+          </p:nvPr>
+        </p:nvSpPr>
+        <p:spPr>
+          <a:xfrm>
+            <a:off x="6115317" y="405685"/>
+            <a:ext cx="5464968" cy="1559301"/>
+          </a:xfrm>
+        </p:spPr>
+        <p:txBody>
+          <a:bodyPr>
+            <a:normAutofit/>
+          </a:bodyPr>
+          <a:lstStyle/>
+          <a:p>
+            <a:r>
+              <a:rPr lang="en-AE" sz="4000" b="1"/>
+              <a:t>Arduino Uno as a Learning Platform</a:t>
+            </a:r>
+            <a:endParaRPr lang="en-AE" sz="4000"/>
+          </a:p>
+        </p:txBody>
+      </p:sp>
+      <p:sp>
+        <p:nvSpPr>
+          <p:cNvPr id="17" name="Content Placeholder 2">
+            <a:extLst>
+              <a:ext uri="{FF2B5EF4-FFF2-40B4-BE49-F238E27FC236}">
+                <a16:creationId xmlns:a16="http://schemas.microsoft.com/office/drawing/2014/main" id="{767927EB-D8F0-DD4F-6DB1-C234C289F9E9}"/>
+              </a:ext>
+            </a:extLst>
+          </p:cNvPr>
+          <p:cNvSpPr>
+            <a:spLocks noGrp="1"/>
+          </p:cNvSpPr>
+          <p:nvPr>
+            <p:ph idx="1"/>
+          </p:nvPr>
+        </p:nvSpPr>
+        <p:spPr>
+          <a:xfrm>
+            <a:off x="6115317" y="2743200"/>
+            <a:ext cx="5247340" cy="3496878"/>
+          </a:xfrm>
+        </p:spPr>
+        <p:txBody>
+          <a:bodyPr anchor="ctr">
+            <a:normAutofit/>
+          </a:bodyPr>
+          <a:lstStyle/>
+          <a:p>
+            <a:pPr lvl="0"/>
+            <a:r>
+              <a:rPr lang="en-AE" sz="2000" dirty="0"/>
+              <a:t>Microcontroller: ATmega328P.</a:t>
+            </a:r>
+          </a:p>
+          <a:p>
+            <a:pPr lvl="0"/>
+            <a:r>
+              <a:rPr lang="en-AE" sz="2000" dirty="0"/>
+              <a:t>Digital pins: read or write HIGH/LOW states.</a:t>
+            </a:r>
+          </a:p>
+          <a:p>
+            <a:pPr lvl="0"/>
+            <a:r>
+              <a:rPr lang="en-AE" sz="2000" dirty="0"/>
+              <a:t>Analogue pins: measure a varying voltage with </a:t>
+            </a:r>
+            <a:r>
+              <a:rPr lang="en-AE" sz="2000" dirty="0" err="1"/>
+              <a:t>analogRead</a:t>
+            </a:r>
+            <a:r>
+              <a:rPr lang="en-AE" sz="2000" dirty="0"/>
+              <a:t>().</a:t>
+            </a:r>
+          </a:p>
+          <a:p>
+            <a:pPr lvl="0"/>
+            <a:r>
+              <a:rPr lang="en-AE" sz="2000" dirty="0"/>
+              <a:t>USB connection: uploads the sketch and provides serial debugging.</a:t>
+            </a:r>
+          </a:p>
+          <a:p>
+            <a:pPr lvl="0"/>
+            <a:r>
+              <a:rPr lang="en-AE" sz="2000" dirty="0"/>
+              <a:t>It is simple enough for first programs and supports the project pattern directly.</a:t>
+            </a:r>
+          </a:p>
+        </p:txBody>
+      </p:sp>
+    </p:spTree>
+    <p:extLst>
+      <p:ext uri="{BB962C8B-B14F-4D97-AF65-F5344CB8AC3E}">
+        <p14:creationId xmlns:p14="http://schemas.microsoft.com/office/powerpoint/2010/main" val="508049359"/>
+      </p:ext>
+    </p:extLst>
+  </p:cSld>
+  <p:clrMapOvr>
+    <a:masterClrMapping/>
+  </p:clrMapOvr>
+</p:sld>
+</file>
+
+<file path=ppt/slides/slide11.xml><?xml version="1.0" encoding="utf-8"?>
+<p:sld xmlns:a="http://schemas.openxmlformats.org/drawingml/2006/main" xmlns:r="http://schemas.openxmlformats.org/officeDocument/2006/relationships" xmlns:p="http://schemas.openxmlformats.org/presentationml/2006/main">
+  <p:cSld>
+    <p:bg>
+      <p:bgPr>
+        <a:solidFill>
+          <a:schemeClr val="bg1"/>
+        </a:solidFill>
+        <a:effectLst/>
+      </p:bgPr>
+    </p:bg>
+    <p:spTree>
+      <p:nvGrpSpPr>
+        <p:cNvPr id="1" name=""/>
+        <p:cNvGrpSpPr/>
+        <p:nvPr/>
+      </p:nvGrpSpPr>
+      <p:grpSpPr>
+        <a:xfrm>
+          <a:off x="0" y="0"/>
+          <a:ext cx="0" cy="0"/>
+          <a:chOff x="0" y="0"/>
+          <a:chExt cx="0" cy="0"/>
+        </a:xfrm>
+      </p:grpSpPr>
+      <p:sp>
+        <p:nvSpPr>
+          <p:cNvPr id="9" name="Rectangle 8">
+            <a:extLst>
+              <a:ext uri="{FF2B5EF4-FFF2-40B4-BE49-F238E27FC236}">
+                <a16:creationId xmlns:a16="http://schemas.microsoft.com/office/drawing/2014/main" id="{42A4FC2C-047E-45A5-965D-8E1E3BF09BC6}"/>
+              </a:ext>
+              <a:ext uri="{C183D7F6-B498-43B3-948B-1728B52AA6E4}">
+                <adec:decorative xmlns:adec="http://schemas.microsoft.com/office/drawing/2017/decorative" val="1"/>
+              </a:ext>
+            </a:extLst>
+          </p:cNvPr>
+          <p:cNvSpPr>
+            <a:spLocks noGrp="1" noRot="1" noChangeAspect="1" noMove="1" noResize="1" noEditPoints="1" noAdjustHandles="1" noChangeArrowheads="1" noChangeShapeType="1" noTextEdit="1"/>
+          </p:cNvSpPr>
+          <p:nvPr>
+            <p:extLst>
+              <p:ext uri="{386F3935-93C4-4BCD-93E2-E3B085C9AB24}">
+                <p16:designElem xmlns:p16="http://schemas.microsoft.com/office/powerpoint/2015/main" val="1"/>
+              </p:ext>
+            </p:extLst>
+          </p:nvPr>
+        </p:nvSpPr>
+        <p:spPr bwMode="white">
+          <a:xfrm>
+            <a:off x="1524" y="0"/>
+            <a:ext cx="12188952" cy="6858000"/>
+          </a:xfrm>
+          <a:prstGeom prst="rect">
+            <a:avLst/>
+          </a:prstGeom>
+          <a:noFill/>
+          <a:ln>
+            <a:noFill/>
+          </a:ln>
+        </p:spPr>
+        <p:style>
+          <a:lnRef idx="2">
+            <a:schemeClr val="accent1">
+              <a:shade val="50000"/>
+            </a:schemeClr>
+          </a:lnRef>
+          <a:fillRef idx="1">
+            <a:schemeClr val="accent1"/>
+          </a:fillRef>
+          <a:effectRef idx="0">
+            <a:schemeClr val="accent1"/>
+          </a:effectRef>
+          <a:fontRef idx="minor">
+            <a:schemeClr val="lt1"/>
+          </a:fontRef>
+        </p:style>
+        <p:txBody>
+          <a:bodyPr rtlCol="0" anchor="ctr"/>
+          <a:lstStyle>
+            <a:defPPr>
+              <a:defRPr lang="en-US"/>
+            </a:defPPr>
+            <a:lvl1pPr marL="0" algn="l" defTabSz="914400" rtl="0" eaLnBrk="1" latinLnBrk="0" hangingPunct="1">
+              <a:defRPr sz="1800" kern="1200">
+                <a:solidFill>
+                  <a:schemeClr val="lt1"/>
+                </a:solidFill>
+                <a:latin typeface="+mn-lt"/>
+                <a:ea typeface="+mn-ea"/>
+                <a:cs typeface="+mn-cs"/>
+              </a:defRPr>
+            </a:lvl1pPr>
+            <a:lvl2pPr marL="457200" algn="l" defTabSz="914400" rtl="0" eaLnBrk="1" latinLnBrk="0" hangingPunct="1">
+              <a:defRPr sz="1800" kern="1200">
+                <a:solidFill>
+                  <a:schemeClr val="lt1"/>
+                </a:solidFill>
+                <a:latin typeface="+mn-lt"/>
+                <a:ea typeface="+mn-ea"/>
+                <a:cs typeface="+mn-cs"/>
+              </a:defRPr>
+            </a:lvl2pPr>
+            <a:lvl3pPr marL="914400" algn="l" defTabSz="914400" rtl="0" eaLnBrk="1" latinLnBrk="0" hangingPunct="1">
+              <a:defRPr sz="1800" kern="1200">
+                <a:solidFill>
+                  <a:schemeClr val="lt1"/>
+                </a:solidFill>
+                <a:latin typeface="+mn-lt"/>
+                <a:ea typeface="+mn-ea"/>
+                <a:cs typeface="+mn-cs"/>
+              </a:defRPr>
+            </a:lvl3pPr>
+            <a:lvl4pPr marL="1371600" algn="l" defTabSz="914400" rtl="0" eaLnBrk="1" latinLnBrk="0" hangingPunct="1">
+              <a:defRPr sz="1800" kern="1200">
+                <a:solidFill>
+                  <a:schemeClr val="lt1"/>
+                </a:solidFill>
+                <a:latin typeface="+mn-lt"/>
+                <a:ea typeface="+mn-ea"/>
+                <a:cs typeface="+mn-cs"/>
+              </a:defRPr>
+            </a:lvl4pPr>
+            <a:lvl5pPr marL="1828800" algn="l" defTabSz="914400" rtl="0" eaLnBrk="1" latinLnBrk="0" hangingPunct="1">
+              <a:defRPr sz="1800" kern="1200">
+                <a:solidFill>
+                  <a:schemeClr val="lt1"/>
+                </a:solidFill>
+                <a:latin typeface="+mn-lt"/>
+                <a:ea typeface="+mn-ea"/>
+                <a:cs typeface="+mn-cs"/>
+              </a:defRPr>
+            </a:lvl5pPr>
+            <a:lvl6pPr marL="2286000" algn="l" defTabSz="914400" rtl="0" eaLnBrk="1" latinLnBrk="0" hangingPunct="1">
+              <a:defRPr sz="1800" kern="1200">
+                <a:solidFill>
+                  <a:schemeClr val="lt1"/>
+                </a:solidFill>
+                <a:latin typeface="+mn-lt"/>
+                <a:ea typeface="+mn-ea"/>
+                <a:cs typeface="+mn-cs"/>
+              </a:defRPr>
+            </a:lvl6pPr>
+            <a:lvl7pPr marL="2743200" algn="l" defTabSz="914400" rtl="0" eaLnBrk="1" latinLnBrk="0" hangingPunct="1">
+              <a:defRPr sz="1800" kern="1200">
+                <a:solidFill>
+                  <a:schemeClr val="lt1"/>
+                </a:solidFill>
+                <a:latin typeface="+mn-lt"/>
+                <a:ea typeface="+mn-ea"/>
+                <a:cs typeface="+mn-cs"/>
+              </a:defRPr>
+            </a:lvl7pPr>
+            <a:lvl8pPr marL="3200400" algn="l" defTabSz="914400" rtl="0" eaLnBrk="1" latinLnBrk="0" hangingPunct="1">
+              <a:defRPr sz="1800" kern="1200">
+                <a:solidFill>
+                  <a:schemeClr val="lt1"/>
+                </a:solidFill>
+                <a:latin typeface="+mn-lt"/>
+                <a:ea typeface="+mn-ea"/>
+                <a:cs typeface="+mn-cs"/>
+              </a:defRPr>
+            </a:lvl8pPr>
+            <a:lvl9pPr marL="3657600" algn="l" defTabSz="914400" rtl="0" eaLnBrk="1" latinLnBrk="0" hangingPunct="1">
+              <a:defRPr sz="1800" kern="1200">
+                <a:solidFill>
+                  <a:schemeClr val="lt1"/>
+                </a:solidFill>
+                <a:latin typeface="+mn-lt"/>
+                <a:ea typeface="+mn-ea"/>
+                <a:cs typeface="+mn-cs"/>
+              </a:defRPr>
+            </a:lvl9pPr>
+          </a:lstStyle>
+          <a:p>
+            <a:pPr algn="ctr"/>
+            <a:endParaRPr lang="en-US"/>
+          </a:p>
+        </p:txBody>
+      </p:sp>
+      <p:pic>
+        <p:nvPicPr>
+          <p:cNvPr id="4" name="Picture 3" descr="Arduino Community Logo | Arduino">
+            <a:extLst>
+              <a:ext uri="{FF2B5EF4-FFF2-40B4-BE49-F238E27FC236}">
+                <a16:creationId xmlns:a16="http://schemas.microsoft.com/office/drawing/2014/main" id="{F3F3073E-4A44-85F0-B5AC-5A4D10C6B4C2}"/>
+              </a:ext>
+            </a:extLst>
+          </p:cNvPr>
+          <p:cNvPicPr>
+            <a:picLocks noChangeAspect="1"/>
+          </p:cNvPicPr>
+          <p:nvPr/>
+        </p:nvPicPr>
+        <p:blipFill>
+          <a:blip r:embed="rId2"/>
+          <a:srcRect l="3365" r="3285"/>
+          <a:stretch>
+            <a:fillRect/>
+          </a:stretch>
+        </p:blipFill>
+        <p:spPr>
+          <a:xfrm>
+            <a:off x="20" y="1282"/>
+            <a:ext cx="12191980" cy="6856718"/>
+          </a:xfrm>
+          <a:prstGeom prst="rect">
+            <a:avLst/>
+          </a:prstGeom>
+        </p:spPr>
+      </p:pic>
+    </p:spTree>
+    <p:extLst>
+      <p:ext uri="{BB962C8B-B14F-4D97-AF65-F5344CB8AC3E}">
+        <p14:creationId xmlns:p14="http://schemas.microsoft.com/office/powerpoint/2010/main" val="2570928306"/>
+      </p:ext>
+    </p:extLst>
+  </p:cSld>
+  <p:clrMapOvr>
+    <a:masterClrMapping/>
+  </p:clrMapOvr>
+</p:sld>
+</file>
+
+<file path=ppt/slides/slide12.xml><?xml version="1.0" encoding="utf-8"?>
+<p:sld xmlns:a="http://schemas.openxmlformats.org/drawingml/2006/main" xmlns:r="http://schemas.openxmlformats.org/officeDocument/2006/relationships" xmlns:p="http://schemas.openxmlformats.org/presentationml/2006/main">
+  <p:cSld>
+    <p:bg>
+      <p:bgPr>
+        <a:solidFill>
+          <a:schemeClr val="bg1"/>
+        </a:solidFill>
+        <a:effectLst/>
+      </p:bgPr>
+    </p:bg>
+    <p:spTree>
+      <p:nvGrpSpPr>
+        <p:cNvPr id="1" name=""/>
+        <p:cNvGrpSpPr/>
+        <p:nvPr/>
+      </p:nvGrpSpPr>
+      <p:grpSpPr>
+        <a:xfrm>
+          <a:off x="0" y="0"/>
+          <a:ext cx="0" cy="0"/>
+          <a:chOff x="0" y="0"/>
+          <a:chExt cx="0" cy="0"/>
+        </a:xfrm>
+      </p:grpSpPr>
+      <p:sp>
+        <p:nvSpPr>
+          <p:cNvPr id="9" name="Rectangle 8">
+            <a:extLst>
+              <a:ext uri="{FF2B5EF4-FFF2-40B4-BE49-F238E27FC236}">
+                <a16:creationId xmlns:a16="http://schemas.microsoft.com/office/drawing/2014/main" id="{42A4FC2C-047E-45A5-965D-8E1E3BF09BC6}"/>
+              </a:ext>
+              <a:ext uri="{C183D7F6-B498-43B3-948B-1728B52AA6E4}">
+                <adec:decorative xmlns:adec="http://schemas.microsoft.com/office/drawing/2017/decorative" val="1"/>
+              </a:ext>
+            </a:extLst>
+          </p:cNvPr>
+          <p:cNvSpPr>
+            <a:spLocks noGrp="1" noRot="1" noChangeAspect="1" noMove="1" noResize="1" noEditPoints="1" noAdjustHandles="1" noChangeArrowheads="1" noChangeShapeType="1" noTextEdit="1"/>
+          </p:cNvSpPr>
+          <p:nvPr>
+            <p:extLst>
+              <p:ext uri="{386F3935-93C4-4BCD-93E2-E3B085C9AB24}">
+                <p16:designElem xmlns:p16="http://schemas.microsoft.com/office/powerpoint/2015/main" val="1"/>
+              </p:ext>
+            </p:extLst>
+          </p:nvPr>
+        </p:nvSpPr>
+        <p:spPr bwMode="white">
+          <a:xfrm>
+            <a:off x="1524" y="0"/>
+            <a:ext cx="12188952" cy="6858000"/>
+          </a:xfrm>
+          <a:prstGeom prst="rect">
+            <a:avLst/>
+          </a:prstGeom>
+          <a:noFill/>
+          <a:ln>
+            <a:noFill/>
+          </a:ln>
+        </p:spPr>
+        <p:style>
+          <a:lnRef idx="2">
+            <a:schemeClr val="accent1">
+              <a:shade val="50000"/>
+            </a:schemeClr>
+          </a:lnRef>
+          <a:fillRef idx="1">
+            <a:schemeClr val="accent1"/>
+          </a:fillRef>
+          <a:effectRef idx="0">
+            <a:schemeClr val="accent1"/>
+          </a:effectRef>
+          <a:fontRef idx="minor">
+            <a:schemeClr val="lt1"/>
+          </a:fontRef>
+        </p:style>
+        <p:txBody>
+          <a:bodyPr rtlCol="0" anchor="ctr"/>
+          <a:lstStyle>
+            <a:defPPr>
+              <a:defRPr lang="en-US"/>
+            </a:defPPr>
+            <a:lvl1pPr marL="0" algn="l" defTabSz="914400" rtl="0" eaLnBrk="1" latinLnBrk="0" hangingPunct="1">
+              <a:defRPr sz="1800" kern="1200">
+                <a:solidFill>
+                  <a:schemeClr val="lt1"/>
+                </a:solidFill>
+                <a:latin typeface="+mn-lt"/>
+                <a:ea typeface="+mn-ea"/>
+                <a:cs typeface="+mn-cs"/>
+              </a:defRPr>
+            </a:lvl1pPr>
+            <a:lvl2pPr marL="457200" algn="l" defTabSz="914400" rtl="0" eaLnBrk="1" latinLnBrk="0" hangingPunct="1">
+              <a:defRPr sz="1800" kern="1200">
+                <a:solidFill>
+                  <a:schemeClr val="lt1"/>
+                </a:solidFill>
+                <a:latin typeface="+mn-lt"/>
+                <a:ea typeface="+mn-ea"/>
+                <a:cs typeface="+mn-cs"/>
+              </a:defRPr>
+            </a:lvl2pPr>
+            <a:lvl3pPr marL="914400" algn="l" defTabSz="914400" rtl="0" eaLnBrk="1" latinLnBrk="0" hangingPunct="1">
+              <a:defRPr sz="1800" kern="1200">
+                <a:solidFill>
+                  <a:schemeClr val="lt1"/>
+                </a:solidFill>
+                <a:latin typeface="+mn-lt"/>
+                <a:ea typeface="+mn-ea"/>
+                <a:cs typeface="+mn-cs"/>
+              </a:defRPr>
+            </a:lvl3pPr>
+            <a:lvl4pPr marL="1371600" algn="l" defTabSz="914400" rtl="0" eaLnBrk="1" latinLnBrk="0" hangingPunct="1">
+              <a:defRPr sz="1800" kern="1200">
+                <a:solidFill>
+                  <a:schemeClr val="lt1"/>
+                </a:solidFill>
+                <a:latin typeface="+mn-lt"/>
+                <a:ea typeface="+mn-ea"/>
+                <a:cs typeface="+mn-cs"/>
+              </a:defRPr>
+            </a:lvl4pPr>
+            <a:lvl5pPr marL="1828800" algn="l" defTabSz="914400" rtl="0" eaLnBrk="1" latinLnBrk="0" hangingPunct="1">
+              <a:defRPr sz="1800" kern="1200">
+                <a:solidFill>
+                  <a:schemeClr val="lt1"/>
+                </a:solidFill>
+                <a:latin typeface="+mn-lt"/>
+                <a:ea typeface="+mn-ea"/>
+                <a:cs typeface="+mn-cs"/>
+              </a:defRPr>
+            </a:lvl5pPr>
+            <a:lvl6pPr marL="2286000" algn="l" defTabSz="914400" rtl="0" eaLnBrk="1" latinLnBrk="0" hangingPunct="1">
+              <a:defRPr sz="1800" kern="1200">
+                <a:solidFill>
+                  <a:schemeClr val="lt1"/>
+                </a:solidFill>
+                <a:latin typeface="+mn-lt"/>
+                <a:ea typeface="+mn-ea"/>
+                <a:cs typeface="+mn-cs"/>
+              </a:defRPr>
+            </a:lvl6pPr>
+            <a:lvl7pPr marL="2743200" algn="l" defTabSz="914400" rtl="0" eaLnBrk="1" latinLnBrk="0" hangingPunct="1">
+              <a:defRPr sz="1800" kern="1200">
+                <a:solidFill>
+                  <a:schemeClr val="lt1"/>
+                </a:solidFill>
+                <a:latin typeface="+mn-lt"/>
+                <a:ea typeface="+mn-ea"/>
+                <a:cs typeface="+mn-cs"/>
+              </a:defRPr>
+            </a:lvl7pPr>
+            <a:lvl8pPr marL="3200400" algn="l" defTabSz="914400" rtl="0" eaLnBrk="1" latinLnBrk="0" hangingPunct="1">
+              <a:defRPr sz="1800" kern="1200">
+                <a:solidFill>
+                  <a:schemeClr val="lt1"/>
+                </a:solidFill>
+                <a:latin typeface="+mn-lt"/>
+                <a:ea typeface="+mn-ea"/>
+                <a:cs typeface="+mn-cs"/>
+              </a:defRPr>
+            </a:lvl8pPr>
+            <a:lvl9pPr marL="3657600" algn="l" defTabSz="914400" rtl="0" eaLnBrk="1" latinLnBrk="0" hangingPunct="1">
+              <a:defRPr sz="1800" kern="1200">
+                <a:solidFill>
+                  <a:schemeClr val="lt1"/>
+                </a:solidFill>
+                <a:latin typeface="+mn-lt"/>
+                <a:ea typeface="+mn-ea"/>
+                <a:cs typeface="+mn-cs"/>
+              </a:defRPr>
+            </a:lvl9pPr>
+          </a:lstStyle>
+          <a:p>
+            <a:pPr algn="ctr"/>
+            <a:endParaRPr lang="en-US"/>
+          </a:p>
+        </p:txBody>
+      </p:sp>
+      <p:pic>
+        <p:nvPicPr>
+          <p:cNvPr id="4" name="Picture 3" descr="How Indoor Lighting Affects Your Cats' Health">
+            <a:extLst>
+              <a:ext uri="{FF2B5EF4-FFF2-40B4-BE49-F238E27FC236}">
+                <a16:creationId xmlns:a16="http://schemas.microsoft.com/office/drawing/2014/main" id="{D256345B-75AC-3989-239F-F5487F6EA1BF}"/>
+              </a:ext>
+            </a:extLst>
+          </p:cNvPr>
+          <p:cNvPicPr>
+            <a:picLocks noChangeAspect="1"/>
+          </p:cNvPicPr>
+          <p:nvPr/>
+        </p:nvPicPr>
+        <p:blipFill>
+          <a:blip r:embed="rId2"/>
+          <a:srcRect t="8437" b="7309"/>
+          <a:stretch>
+            <a:fillRect/>
+          </a:stretch>
+        </p:blipFill>
+        <p:spPr>
+          <a:xfrm>
+            <a:off x="20" y="1282"/>
+            <a:ext cx="12191980" cy="6856718"/>
+          </a:xfrm>
+          <a:prstGeom prst="rect">
+            <a:avLst/>
+          </a:prstGeom>
+        </p:spPr>
+      </p:pic>
+    </p:spTree>
+    <p:extLst>
+      <p:ext uri="{BB962C8B-B14F-4D97-AF65-F5344CB8AC3E}">
+        <p14:creationId xmlns:p14="http://schemas.microsoft.com/office/powerpoint/2010/main" val="3003837189"/>
+      </p:ext>
+    </p:extLst>
+  </p:cSld>
+  <p:clrMapOvr>
+    <a:masterClrMapping/>
+  </p:clrMapOvr>
+</p:sld>
+</file>
+
+<file path=ppt/slides/slide13.xml><?xml version="1.0" encoding="utf-8"?>
+<p:sld xmlns:a="http://schemas.openxmlformats.org/drawingml/2006/main" xmlns:r="http://schemas.openxmlformats.org/officeDocument/2006/relationships" xmlns:p="http://schemas.openxmlformats.org/presentationml/2006/main">
+  <p:cSld>
+    <p:bg>
+      <p:bgPr>
+        <a:solidFill>
+          <a:schemeClr val="bg1"/>
+        </a:solidFill>
+        <a:effectLst/>
+      </p:bgPr>
+    </p:bg>
+    <p:spTree>
+      <p:nvGrpSpPr>
+        <p:cNvPr id="1" name=""/>
+        <p:cNvGrpSpPr/>
+        <p:nvPr/>
+      </p:nvGrpSpPr>
+      <p:grpSpPr>
+        <a:xfrm>
+          <a:off x="0" y="0"/>
+          <a:ext cx="0" cy="0"/>
+          <a:chOff x="0" y="0"/>
+          <a:chExt cx="0" cy="0"/>
+        </a:xfrm>
+      </p:grpSpPr>
+      <p:sp>
+        <p:nvSpPr>
+          <p:cNvPr id="9" name="Rectangle 8">
+            <a:extLst>
+              <a:ext uri="{FF2B5EF4-FFF2-40B4-BE49-F238E27FC236}">
+                <a16:creationId xmlns:a16="http://schemas.microsoft.com/office/drawing/2014/main" id="{42A4FC2C-047E-45A5-965D-8E1E3BF09BC6}"/>
+              </a:ext>
+              <a:ext uri="{C183D7F6-B498-43B3-948B-1728B52AA6E4}">
+                <adec:decorative xmlns:adec="http://schemas.microsoft.com/office/drawing/2017/decorative" val="1"/>
+              </a:ext>
+            </a:extLst>
+          </p:cNvPr>
+          <p:cNvSpPr>
+            <a:spLocks noGrp="1" noRot="1" noChangeAspect="1" noMove="1" noResize="1" noEditPoints="1" noAdjustHandles="1" noChangeArrowheads="1" noChangeShapeType="1" noTextEdit="1"/>
+          </p:cNvSpPr>
+          <p:nvPr>
+            <p:extLst>
+              <p:ext uri="{386F3935-93C4-4BCD-93E2-E3B085C9AB24}">
+                <p16:designElem xmlns:p16="http://schemas.microsoft.com/office/powerpoint/2015/main" val="1"/>
+              </p:ext>
+            </p:extLst>
+          </p:nvPr>
+        </p:nvSpPr>
+        <p:spPr bwMode="white">
+          <a:xfrm>
+            <a:off x="1524" y="0"/>
+            <a:ext cx="12188952" cy="6858000"/>
+          </a:xfrm>
+          <a:prstGeom prst="rect">
+            <a:avLst/>
+          </a:prstGeom>
+          <a:noFill/>
+          <a:ln>
+            <a:noFill/>
+          </a:ln>
+        </p:spPr>
+        <p:style>
+          <a:lnRef idx="2">
+            <a:schemeClr val="accent1">
+              <a:shade val="50000"/>
+            </a:schemeClr>
+          </a:lnRef>
+          <a:fillRef idx="1">
+            <a:schemeClr val="accent1"/>
+          </a:fillRef>
+          <a:effectRef idx="0">
+            <a:schemeClr val="accent1"/>
+          </a:effectRef>
+          <a:fontRef idx="minor">
+            <a:schemeClr val="lt1"/>
+          </a:fontRef>
+        </p:style>
+        <p:txBody>
+          <a:bodyPr rtlCol="0" anchor="ctr"/>
+          <a:lstStyle>
+            <a:defPPr>
+              <a:defRPr lang="en-US"/>
+            </a:defPPr>
+            <a:lvl1pPr marL="0" algn="l" defTabSz="914400" rtl="0" eaLnBrk="1" latinLnBrk="0" hangingPunct="1">
+              <a:defRPr sz="1800" kern="1200">
+                <a:solidFill>
+                  <a:schemeClr val="lt1"/>
+                </a:solidFill>
+                <a:latin typeface="+mn-lt"/>
+                <a:ea typeface="+mn-ea"/>
+                <a:cs typeface="+mn-cs"/>
+              </a:defRPr>
+            </a:lvl1pPr>
+            <a:lvl2pPr marL="457200" algn="l" defTabSz="914400" rtl="0" eaLnBrk="1" latinLnBrk="0" hangingPunct="1">
+              <a:defRPr sz="1800" kern="1200">
+                <a:solidFill>
+                  <a:schemeClr val="lt1"/>
+                </a:solidFill>
+                <a:latin typeface="+mn-lt"/>
+                <a:ea typeface="+mn-ea"/>
+                <a:cs typeface="+mn-cs"/>
+              </a:defRPr>
+            </a:lvl2pPr>
+            <a:lvl3pPr marL="914400" algn="l" defTabSz="914400" rtl="0" eaLnBrk="1" latinLnBrk="0" hangingPunct="1">
+              <a:defRPr sz="1800" kern="1200">
+                <a:solidFill>
+                  <a:schemeClr val="lt1"/>
+                </a:solidFill>
+                <a:latin typeface="+mn-lt"/>
+                <a:ea typeface="+mn-ea"/>
+                <a:cs typeface="+mn-cs"/>
+              </a:defRPr>
+            </a:lvl3pPr>
+            <a:lvl4pPr marL="1371600" algn="l" defTabSz="914400" rtl="0" eaLnBrk="1" latinLnBrk="0" hangingPunct="1">
+              <a:defRPr sz="1800" kern="1200">
+                <a:solidFill>
+                  <a:schemeClr val="lt1"/>
+                </a:solidFill>
+                <a:latin typeface="+mn-lt"/>
+                <a:ea typeface="+mn-ea"/>
+                <a:cs typeface="+mn-cs"/>
+              </a:defRPr>
+            </a:lvl4pPr>
+            <a:lvl5pPr marL="1828800" algn="l" defTabSz="914400" rtl="0" eaLnBrk="1" latinLnBrk="0" hangingPunct="1">
+              <a:defRPr sz="1800" kern="1200">
+                <a:solidFill>
+                  <a:schemeClr val="lt1"/>
+                </a:solidFill>
+                <a:latin typeface="+mn-lt"/>
+                <a:ea typeface="+mn-ea"/>
+                <a:cs typeface="+mn-cs"/>
+              </a:defRPr>
+            </a:lvl5pPr>
+            <a:lvl6pPr marL="2286000" algn="l" defTabSz="914400" rtl="0" eaLnBrk="1" latinLnBrk="0" hangingPunct="1">
+              <a:defRPr sz="1800" kern="1200">
+                <a:solidFill>
+                  <a:schemeClr val="lt1"/>
+                </a:solidFill>
+                <a:latin typeface="+mn-lt"/>
+                <a:ea typeface="+mn-ea"/>
+                <a:cs typeface="+mn-cs"/>
+              </a:defRPr>
+            </a:lvl6pPr>
+            <a:lvl7pPr marL="2743200" algn="l" defTabSz="914400" rtl="0" eaLnBrk="1" latinLnBrk="0" hangingPunct="1">
+              <a:defRPr sz="1800" kern="1200">
+                <a:solidFill>
+                  <a:schemeClr val="lt1"/>
+                </a:solidFill>
+                <a:latin typeface="+mn-lt"/>
+                <a:ea typeface="+mn-ea"/>
+                <a:cs typeface="+mn-cs"/>
+              </a:defRPr>
+            </a:lvl7pPr>
+            <a:lvl8pPr marL="3200400" algn="l" defTabSz="914400" rtl="0" eaLnBrk="1" latinLnBrk="0" hangingPunct="1">
+              <a:defRPr sz="1800" kern="1200">
+                <a:solidFill>
+                  <a:schemeClr val="lt1"/>
+                </a:solidFill>
+                <a:latin typeface="+mn-lt"/>
+                <a:ea typeface="+mn-ea"/>
+                <a:cs typeface="+mn-cs"/>
+              </a:defRPr>
+            </a:lvl8pPr>
+            <a:lvl9pPr marL="3657600" algn="l" defTabSz="914400" rtl="0" eaLnBrk="1" latinLnBrk="0" hangingPunct="1">
+              <a:defRPr sz="1800" kern="1200">
+                <a:solidFill>
+                  <a:schemeClr val="lt1"/>
+                </a:solidFill>
+                <a:latin typeface="+mn-lt"/>
+                <a:ea typeface="+mn-ea"/>
+                <a:cs typeface="+mn-cs"/>
+              </a:defRPr>
+            </a:lvl9pPr>
+          </a:lstStyle>
+          <a:p>
+            <a:pPr algn="ctr"/>
+            <a:endParaRPr lang="en-US"/>
+          </a:p>
+        </p:txBody>
+      </p:sp>
+      <p:pic>
+        <p:nvPicPr>
+          <p:cNvPr id="4" name="Picture 3">
+            <a:extLst>
+              <a:ext uri="{FF2B5EF4-FFF2-40B4-BE49-F238E27FC236}">
+                <a16:creationId xmlns:a16="http://schemas.microsoft.com/office/drawing/2014/main" id="{A219D792-5AA8-37CB-CB8F-33F81686543C}"/>
+              </a:ext>
+            </a:extLst>
+          </p:cNvPr>
+          <p:cNvPicPr>
+            <a:picLocks noChangeAspect="1"/>
+          </p:cNvPicPr>
+          <p:nvPr/>
+        </p:nvPicPr>
+        <p:blipFill>
+          <a:blip r:embed="rId3">
+            <a:extLst>
+              <a:ext uri="{28A0092B-C50C-407E-A947-70E740481C1C}">
+                <a14:useLocalDpi xmlns:a14="http://schemas.microsoft.com/office/drawing/2010/main" val="0"/>
+              </a:ext>
+            </a:extLst>
+          </a:blip>
+          <a:srcRect t="9" b="9"/>
+          <a:stretch/>
+        </p:blipFill>
+        <p:spPr>
+          <a:xfrm>
+            <a:off x="20" y="1282"/>
+            <a:ext cx="12191980" cy="6856718"/>
+          </a:xfrm>
+          <a:prstGeom prst="rect">
+            <a:avLst/>
+          </a:prstGeom>
+        </p:spPr>
+      </p:pic>
+    </p:spTree>
+    <p:extLst>
+      <p:ext uri="{BB962C8B-B14F-4D97-AF65-F5344CB8AC3E}">
+        <p14:creationId xmlns:p14="http://schemas.microsoft.com/office/powerpoint/2010/main" val="2773309619"/>
+      </p:ext>
+    </p:extLst>
+  </p:cSld>
+  <p:clrMapOvr>
+    <a:masterClrMapping/>
+  </p:clrMapOvr>
+</p:sld>
+</file>
+
+<file path=ppt/slides/slide14.xml><?xml version="1.0" encoding="utf-8"?>
+<p:sld xmlns:a="http://schemas.openxmlformats.org/drawingml/2006/main" xmlns:r="http://schemas.openxmlformats.org/officeDocument/2006/relationships" xmlns:p="http://schemas.openxmlformats.org/presentationml/2006/main">
+  <p:cSld>
+    <p:spTree>
+      <p:nvGrpSpPr>
+        <p:cNvPr id="1" name=""/>
+        <p:cNvGrpSpPr/>
+        <p:nvPr/>
+      </p:nvGrpSpPr>
+      <p:grpSpPr>
+        <a:xfrm>
+          <a:off x="0" y="0"/>
+          <a:ext cx="0" cy="0"/>
+          <a:chOff x="0" y="0"/>
+          <a:chExt cx="0" cy="0"/>
+        </a:xfrm>
+      </p:grpSpPr>
+      <p:sp>
+        <p:nvSpPr>
+          <p:cNvPr id="2" name="Title 1">
+            <a:extLst>
+              <a:ext uri="{FF2B5EF4-FFF2-40B4-BE49-F238E27FC236}">
+                <a16:creationId xmlns:a16="http://schemas.microsoft.com/office/drawing/2014/main" id="{55D1F48A-637A-F07D-3489-3D9C150C7833}"/>
+              </a:ext>
+            </a:extLst>
+          </p:cNvPr>
+          <p:cNvSpPr>
+            <a:spLocks noGrp="1"/>
+          </p:cNvSpPr>
+          <p:nvPr>
+            <p:ph type="title"/>
+          </p:nvPr>
+        </p:nvSpPr>
+        <p:spPr/>
+        <p:txBody>
+          <a:bodyPr/>
+          <a:lstStyle/>
+          <a:p>
+            <a:r>
+              <a:rPr lang="en-AE" b="1" dirty="0" err="1"/>
+              <a:t>Tinkercad</a:t>
+            </a:r>
+            <a:r>
+              <a:rPr lang="en-AE" b="1" dirty="0"/>
+              <a:t> and </a:t>
+            </a:r>
+            <a:r>
+              <a:rPr lang="en-AE" b="1" dirty="0" err="1"/>
+              <a:t>Wokwi</a:t>
+            </a:r>
+            <a:endParaRPr lang="en-AE" dirty="0"/>
+          </a:p>
+        </p:txBody>
+      </p:sp>
+      <p:graphicFrame>
+        <p:nvGraphicFramePr>
+          <p:cNvPr id="4" name="Content Placeholder 3">
+            <a:extLst>
+              <a:ext uri="{FF2B5EF4-FFF2-40B4-BE49-F238E27FC236}">
+                <a16:creationId xmlns:a16="http://schemas.microsoft.com/office/drawing/2014/main" id="{012627D5-737E-3042-8E99-1C6D382D3F30}"/>
+              </a:ext>
+            </a:extLst>
+          </p:cNvPr>
+          <p:cNvGraphicFramePr>
+            <a:graphicFrameLocks noGrp="1"/>
+          </p:cNvGraphicFramePr>
+          <p:nvPr>
+            <p:ph idx="1"/>
+            <p:extLst>
+              <p:ext uri="{D42A27DB-BD31-4B8C-83A1-F6EECF244321}">
+                <p14:modId xmlns:p14="http://schemas.microsoft.com/office/powerpoint/2010/main" val="3973948190"/>
+              </p:ext>
+            </p:extLst>
+          </p:nvPr>
+        </p:nvGraphicFramePr>
+        <p:xfrm>
+          <a:off x="933763" y="1580584"/>
+          <a:ext cx="10360050" cy="2390502"/>
+        </p:xfrm>
+        <a:graphic>
+          <a:graphicData uri="http://schemas.openxmlformats.org/drawingml/2006/table">
+            <a:tbl>
+              <a:tblPr>
+                <a:tableStyleId>{5C22544A-7EE6-4342-B048-85BDC9FD1C3A}</a:tableStyleId>
+              </a:tblPr>
+              <a:tblGrid>
+                <a:gridCol w="5180025">
+                  <a:extLst>
+                    <a:ext uri="{9D8B030D-6E8A-4147-A177-3AD203B41FA5}">
+                      <a16:colId xmlns:a16="http://schemas.microsoft.com/office/drawing/2014/main" val="1620892121"/>
+                    </a:ext>
+                  </a:extLst>
+                </a:gridCol>
+                <a:gridCol w="5180025">
+                  <a:extLst>
+                    <a:ext uri="{9D8B030D-6E8A-4147-A177-3AD203B41FA5}">
+                      <a16:colId xmlns:a16="http://schemas.microsoft.com/office/drawing/2014/main" val="3357143267"/>
+                    </a:ext>
+                  </a:extLst>
+                </a:gridCol>
+              </a:tblGrid>
+              <a:tr h="302002">
+                <a:tc>
+                  <a:txBody>
+                    <a:bodyPr/>
+                    <a:lstStyle/>
+                    <a:p>
+                      <a:pPr marL="0" marR="0" algn="l" latinLnBrk="0">
+                        <a:spcBef>
+                          <a:spcPts val="750"/>
+                        </a:spcBef>
+                        <a:spcAft>
+                          <a:spcPts val="1125"/>
+                        </a:spcAft>
+                        <a:buNone/>
+                      </a:pPr>
+                      <a:r>
+                        <a:rPr lang="en-AE" sz="2400">
+                          <a:effectLst/>
+                        </a:rPr>
+                        <a:t>Tool</a:t>
+                      </a:r>
+                      <a:endParaRPr lang="en-AE" sz="2400" b="1" i="0">
+                        <a:solidFill>
+                          <a:srgbClr val="000000"/>
+                        </a:solidFill>
+                        <a:effectLst/>
+                        <a:latin typeface="Helvetica Neue"/>
+                      </a:endParaRPr>
+                    </a:p>
+                  </a:txBody>
+                  <a:tcPr marL="70757" marR="70757" marT="32657" marB="32657" anchor="ctr"/>
+                </a:tc>
+                <a:tc>
+                  <a:txBody>
+                    <a:bodyPr/>
+                    <a:lstStyle/>
+                    <a:p>
+                      <a:pPr marL="0" marR="0" algn="l" latinLnBrk="0">
+                        <a:spcBef>
+                          <a:spcPts val="750"/>
+                        </a:spcBef>
+                        <a:spcAft>
+                          <a:spcPts val="1125"/>
+                        </a:spcAft>
+                        <a:buNone/>
+                      </a:pPr>
+                      <a:r>
+                        <a:rPr lang="en-AE" sz="2400">
+                          <a:effectLst/>
+                        </a:rPr>
+                        <a:t>Use it for</a:t>
+                      </a:r>
+                      <a:endParaRPr lang="en-AE" sz="2400" b="1" i="0">
+                        <a:solidFill>
+                          <a:srgbClr val="000000"/>
+                        </a:solidFill>
+                        <a:effectLst/>
+                        <a:latin typeface="Helvetica Neue"/>
+                      </a:endParaRPr>
+                    </a:p>
+                  </a:txBody>
+                  <a:tcPr marL="70757" marR="70757" marT="32657" marB="32657" anchor="ctr"/>
+                </a:tc>
+                <a:extLst>
+                  <a:ext uri="{0D108BD9-81ED-4DB2-BD59-A6C34878D82A}">
+                    <a16:rowId xmlns:a16="http://schemas.microsoft.com/office/drawing/2014/main" val="2858171412"/>
+                  </a:ext>
+                </a:extLst>
+              </a:tr>
+              <a:tr h="747059">
+                <a:tc>
+                  <a:txBody>
+                    <a:bodyPr/>
+                    <a:lstStyle/>
+                    <a:p>
+                      <a:pPr marL="0" marR="0" algn="l" latinLnBrk="0">
+                        <a:spcBef>
+                          <a:spcPts val="750"/>
+                        </a:spcBef>
+                        <a:spcAft>
+                          <a:spcPts val="1125"/>
+                        </a:spcAft>
+                        <a:buNone/>
+                      </a:pPr>
+                      <a:r>
+                        <a:rPr lang="en-AE" sz="2400">
+                          <a:effectLst/>
+                        </a:rPr>
+                        <a:t>Tinkercad Circuits</a:t>
+                      </a:r>
+                      <a:endParaRPr lang="en-AE" sz="2400" b="0" i="0">
+                        <a:solidFill>
+                          <a:srgbClr val="333333"/>
+                        </a:solidFill>
+                        <a:effectLst/>
+                        <a:latin typeface="Helvetica Neue"/>
+                      </a:endParaRPr>
+                    </a:p>
+                  </a:txBody>
+                  <a:tcPr marL="70757" marR="70757" marT="32657" marB="32657" anchor="ctr"/>
+                </a:tc>
+                <a:tc>
+                  <a:txBody>
+                    <a:bodyPr/>
+                    <a:lstStyle/>
+                    <a:p>
+                      <a:pPr marL="0" marR="0" algn="l" latinLnBrk="0">
+                        <a:spcBef>
+                          <a:spcPts val="750"/>
+                        </a:spcBef>
+                        <a:spcAft>
+                          <a:spcPts val="1125"/>
+                        </a:spcAft>
+                        <a:buNone/>
+                      </a:pPr>
+                      <a:r>
+                        <a:rPr lang="en-AE" sz="2400">
+                          <a:effectLst/>
+                        </a:rPr>
+                        <a:t>First circuits, Arduino Uno, LEDs, buttons, LDRs and beginner code</a:t>
+                      </a:r>
+                      <a:endParaRPr lang="en-AE" sz="2400" b="0" i="0">
+                        <a:solidFill>
+                          <a:srgbClr val="333333"/>
+                        </a:solidFill>
+                        <a:effectLst/>
+                        <a:latin typeface="Helvetica Neue"/>
+                      </a:endParaRPr>
+                    </a:p>
+                  </a:txBody>
+                  <a:tcPr marL="70757" marR="70757" marT="32657" marB="32657" anchor="ctr"/>
+                </a:tc>
+                <a:extLst>
+                  <a:ext uri="{0D108BD9-81ED-4DB2-BD59-A6C34878D82A}">
+                    <a16:rowId xmlns:a16="http://schemas.microsoft.com/office/drawing/2014/main" val="595171112"/>
+                  </a:ext>
+                </a:extLst>
+              </a:tr>
+              <a:tr h="969587">
+                <a:tc>
+                  <a:txBody>
+                    <a:bodyPr/>
+                    <a:lstStyle/>
+                    <a:p>
+                      <a:pPr marL="0" marR="0" algn="l" latinLnBrk="0">
+                        <a:spcBef>
+                          <a:spcPts val="750"/>
+                        </a:spcBef>
+                        <a:spcAft>
+                          <a:spcPts val="1125"/>
+                        </a:spcAft>
+                        <a:buNone/>
+                      </a:pPr>
+                      <a:r>
+                        <a:rPr lang="en-AE" sz="2400">
+                          <a:effectLst/>
+                        </a:rPr>
+                        <a:t>Wokwi</a:t>
+                      </a:r>
+                      <a:endParaRPr lang="en-AE" sz="2400" b="0" i="0">
+                        <a:solidFill>
+                          <a:srgbClr val="333333"/>
+                        </a:solidFill>
+                        <a:effectLst/>
+                        <a:latin typeface="Helvetica Neue"/>
+                      </a:endParaRPr>
+                    </a:p>
+                  </a:txBody>
+                  <a:tcPr marL="70757" marR="70757" marT="32657" marB="32657" anchor="ctr"/>
+                </a:tc>
+                <a:tc>
+                  <a:txBody>
+                    <a:bodyPr/>
+                    <a:lstStyle/>
+                    <a:p>
+                      <a:pPr marL="0" marR="0" algn="l" latinLnBrk="0">
+                        <a:spcBef>
+                          <a:spcPts val="750"/>
+                        </a:spcBef>
+                        <a:spcAft>
+                          <a:spcPts val="1125"/>
+                        </a:spcAft>
+                        <a:buNone/>
+                      </a:pPr>
+                      <a:r>
+                        <a:rPr lang="en-AE" sz="2400" dirty="0">
+                          <a:effectLst/>
+                        </a:rPr>
+                        <a:t>I2C LCD, ESP32 extensions, serial monitor and shareable advanced simulations</a:t>
+                      </a:r>
+                      <a:endParaRPr lang="en-AE" sz="2400" b="0" i="0" dirty="0">
+                        <a:solidFill>
+                          <a:srgbClr val="333333"/>
+                        </a:solidFill>
+                        <a:effectLst/>
+                        <a:latin typeface="Helvetica Neue"/>
+                      </a:endParaRPr>
+                    </a:p>
+                  </a:txBody>
+                  <a:tcPr marL="70757" marR="70757" marT="32657" marB="32657" anchor="ctr"/>
+                </a:tc>
+                <a:extLst>
+                  <a:ext uri="{0D108BD9-81ED-4DB2-BD59-A6C34878D82A}">
+                    <a16:rowId xmlns:a16="http://schemas.microsoft.com/office/drawing/2014/main" val="1640238490"/>
+                  </a:ext>
+                </a:extLst>
+              </a:tr>
+            </a:tbl>
+          </a:graphicData>
+        </a:graphic>
+      </p:graphicFrame>
+      <p:graphicFrame>
+        <p:nvGraphicFramePr>
+          <p:cNvPr id="8" name="TextBox 5">
+            <a:extLst>
+              <a:ext uri="{FF2B5EF4-FFF2-40B4-BE49-F238E27FC236}">
+                <a16:creationId xmlns:a16="http://schemas.microsoft.com/office/drawing/2014/main" id="{25CCC8B4-1B80-1879-031B-601CBD88F8B3}"/>
+              </a:ext>
+            </a:extLst>
+          </p:cNvPr>
+          <p:cNvGraphicFramePr/>
+          <p:nvPr>
+            <p:extLst>
+              <p:ext uri="{D42A27DB-BD31-4B8C-83A1-F6EECF244321}">
+                <p14:modId xmlns:p14="http://schemas.microsoft.com/office/powerpoint/2010/main" val="2717375173"/>
+              </p:ext>
+            </p:extLst>
+          </p:nvPr>
+        </p:nvGraphicFramePr>
+        <p:xfrm>
+          <a:off x="838200" y="4333515"/>
+          <a:ext cx="10360049" cy="2123658"/>
+        </p:xfrm>
+        <a:graphic>
+          <a:graphicData uri="http://schemas.openxmlformats.org/drawingml/2006/diagram">
+            <dgm:relIds xmlns:dgm="http://schemas.openxmlformats.org/drawingml/2006/diagram" xmlns:r="http://schemas.openxmlformats.org/officeDocument/2006/relationships" r:dm="rId3" r:lo="rId4" r:qs="rId5" r:cs="rId6"/>
+          </a:graphicData>
+        </a:graphic>
+      </p:graphicFrame>
+    </p:spTree>
+    <p:extLst>
+      <p:ext uri="{BB962C8B-B14F-4D97-AF65-F5344CB8AC3E}">
+        <p14:creationId xmlns:p14="http://schemas.microsoft.com/office/powerpoint/2010/main" val="3422727164"/>
+      </p:ext>
+    </p:extLst>
+  </p:cSld>
+  <p:clrMapOvr>
+    <a:masterClrMapping/>
+  </p:clrMapOvr>
+</p:sld>
+</file>
+
+<file path=ppt/slides/slide15.xml><?xml version="1.0" encoding="utf-8"?>
+<p:sld xmlns:a="http://schemas.openxmlformats.org/drawingml/2006/main" xmlns:r="http://schemas.openxmlformats.org/officeDocument/2006/relationships" xmlns:p="http://schemas.openxmlformats.org/presentationml/2006/main">
+  <p:cSld>
     <p:spTree>
       <p:nvGrpSpPr>
         <p:cNvPr id="1" name=""/>
@@ -29615,7 +31042,7 @@
 </p:sld>
 </file>
 
-<file path=ppt/slides/slide11.xml><?xml version="1.0" encoding="utf-8"?>
+<file path=ppt/slides/slide16.xml><?xml version="1.0" encoding="utf-8"?>
 <p:sld xmlns:a="http://schemas.openxmlformats.org/drawingml/2006/main" xmlns:r="http://schemas.openxmlformats.org/officeDocument/2006/relationships" xmlns:p="http://schemas.openxmlformats.org/presentationml/2006/main">
   <p:cSld>
     <p:bg>
@@ -30030,7 +31457,7 @@
 </p:sld>
 </file>
 
-<file path=ppt/slides/slide12.xml><?xml version="1.0" encoding="utf-8"?>
+<file path=ppt/slides/slide17.xml><?xml version="1.0" encoding="utf-8"?>
 <p:sld xmlns:a="http://schemas.openxmlformats.org/drawingml/2006/main" xmlns:r="http://schemas.openxmlformats.org/officeDocument/2006/relationships" xmlns:p="http://schemas.openxmlformats.org/presentationml/2006/main">
   <p:cSld>
     <p:spTree>
@@ -30281,7 +31708,7 @@
 </p:sld>
 </file>
 
-<file path=ppt/slides/slide13.xml><?xml version="1.0" encoding="utf-8"?>
+<file path=ppt/slides/slide18.xml><?xml version="1.0" encoding="utf-8"?>
 <p:sld xmlns:a="http://schemas.openxmlformats.org/drawingml/2006/main" xmlns:r="http://schemas.openxmlformats.org/officeDocument/2006/relationships" xmlns:p="http://schemas.openxmlformats.org/presentationml/2006/main">
   <p:cSld>
     <p:spTree>
@@ -30454,7 +31881,7 @@
 </p:sld>
 </file>
 
-<file path=ppt/slides/slide14.xml><?xml version="1.0" encoding="utf-8"?>
+<file path=ppt/slides/slide19.xml><?xml version="1.0" encoding="utf-8"?>
 <p:sld xmlns:a="http://schemas.openxmlformats.org/drawingml/2006/main" xmlns:r="http://schemas.openxmlformats.org/officeDocument/2006/relationships" xmlns:p="http://schemas.openxmlformats.org/presentationml/2006/main">
   <p:cSld>
     <p:bg>
@@ -32208,7 +33635,213 @@
 </p:sld>
 </file>
 
-<file path=ppt/slides/slide15.xml><?xml version="1.0" encoding="utf-8"?>
+<file path=ppt/slides/slide2.xml><?xml version="1.0" encoding="utf-8"?>
+<p:sld xmlns:a="http://schemas.openxmlformats.org/drawingml/2006/main" xmlns:r="http://schemas.openxmlformats.org/officeDocument/2006/relationships" xmlns:p="http://schemas.openxmlformats.org/presentationml/2006/main">
+  <p:cSld>
+    <p:spTree>
+      <p:nvGrpSpPr>
+        <p:cNvPr id="1" name=""/>
+        <p:cNvGrpSpPr/>
+        <p:nvPr/>
+      </p:nvGrpSpPr>
+      <p:grpSpPr>
+        <a:xfrm>
+          <a:off x="0" y="0"/>
+          <a:ext cx="0" cy="0"/>
+          <a:chOff x="0" y="0"/>
+          <a:chExt cx="0" cy="0"/>
+        </a:xfrm>
+      </p:grpSpPr>
+      <p:pic>
+        <p:nvPicPr>
+          <p:cNvPr id="4" name="WhatsApp Video 2026-09-29 at 11.23.01 PM">
+            <a:hlinkClick r:id="" action="ppaction://media"/>
+            <a:extLst>
+              <a:ext uri="{FF2B5EF4-FFF2-40B4-BE49-F238E27FC236}">
+                <a16:creationId xmlns:a16="http://schemas.microsoft.com/office/drawing/2014/main" id="{AC5FCED0-90CA-A7FC-B1CD-8FDE96EADE8D}"/>
+              </a:ext>
+            </a:extLst>
+          </p:cNvPr>
+          <p:cNvPicPr>
+            <a:picLocks noChangeAspect="1"/>
+          </p:cNvPicPr>
+          <p:nvPr>
+            <a:videoFile r:link="rId2"/>
+            <p:extLst>
+              <p:ext uri="{DAA4B4D4-6D71-4841-9C94-3DE7FCFB9230}">
+                <p14:media xmlns:p14="http://schemas.microsoft.com/office/powerpoint/2010/main" r:embed="rId1"/>
+              </p:ext>
+            </p:extLst>
+          </p:nvPr>
+        </p:nvPicPr>
+        <p:blipFill>
+          <a:blip r:embed="rId4"/>
+          <a:stretch>
+            <a:fillRect/>
+          </a:stretch>
+        </p:blipFill>
+        <p:spPr>
+          <a:xfrm>
+            <a:off x="3002059" y="57901"/>
+            <a:ext cx="6187881" cy="6676596"/>
+          </a:xfrm>
+          <a:prstGeom prst="rect">
+            <a:avLst/>
+          </a:prstGeom>
+        </p:spPr>
+      </p:pic>
+    </p:spTree>
+    <p:extLst>
+      <p:ext uri="{BB962C8B-B14F-4D97-AF65-F5344CB8AC3E}">
+        <p14:creationId xmlns:p14="http://schemas.microsoft.com/office/powerpoint/2010/main" val="3821943161"/>
+      </p:ext>
+    </p:extLst>
+  </p:cSld>
+  <p:clrMapOvr>
+    <a:masterClrMapping/>
+  </p:clrMapOvr>
+  <p:timing>
+    <p:tnLst>
+      <p:par>
+        <p:cTn id="1" dur="indefinite" restart="never" nodeType="tmRoot">
+          <p:childTnLst>
+            <p:seq concurrent="1" nextAc="seek">
+              <p:cTn id="2" dur="indefinite" nodeType="mainSeq">
+                <p:childTnLst>
+                  <p:par>
+                    <p:cTn id="3" fill="hold">
+                      <p:stCondLst>
+                        <p:cond delay="indefinite"/>
+                        <p:cond evt="onBegin" delay="0">
+                          <p:tn val="2"/>
+                        </p:cond>
+                      </p:stCondLst>
+                      <p:childTnLst>
+                        <p:par>
+                          <p:cTn id="4" fill="hold">
+                            <p:stCondLst>
+                              <p:cond delay="0"/>
+                            </p:stCondLst>
+                            <p:childTnLst>
+                              <p:par>
+                                <p:cTn id="5" presetID="1" presetClass="mediacall" presetSubtype="0" fill="hold" nodeType="afterEffect">
+                                  <p:stCondLst>
+                                    <p:cond delay="0"/>
+                                  </p:stCondLst>
+                                  <p:childTnLst>
+                                    <p:cmd type="call" cmd="playFrom(0.0)">
+                                      <p:cBhvr>
+                                        <p:cTn id="6" dur="30046" fill="hold"/>
+                                        <p:tgtEl>
+                                          <p:spTgt spid="4"/>
+                                        </p:tgtEl>
+                                      </p:cBhvr>
+                                    </p:cmd>
+                                  </p:childTnLst>
+                                </p:cTn>
+                              </p:par>
+                            </p:childTnLst>
+                          </p:cTn>
+                        </p:par>
+                      </p:childTnLst>
+                    </p:cTn>
+                  </p:par>
+                </p:childTnLst>
+              </p:cTn>
+              <p:prevCondLst>
+                <p:cond evt="onPrev" delay="0">
+                  <p:tgtEl>
+                    <p:sldTgt/>
+                  </p:tgtEl>
+                </p:cond>
+              </p:prevCondLst>
+              <p:nextCondLst>
+                <p:cond evt="onNext" delay="0">
+                  <p:tgtEl>
+                    <p:sldTgt/>
+                  </p:tgtEl>
+                </p:cond>
+              </p:nextCondLst>
+            </p:seq>
+            <p:video>
+              <p:cMediaNode vol="80000">
+                <p:cTn id="7" fill="hold" display="0">
+                  <p:stCondLst>
+                    <p:cond delay="indefinite"/>
+                  </p:stCondLst>
+                </p:cTn>
+                <p:tgtEl>
+                  <p:spTgt spid="4"/>
+                </p:tgtEl>
+              </p:cMediaNode>
+            </p:video>
+            <p:seq concurrent="1" nextAc="seek">
+              <p:cTn id="8" restart="whenNotActive" fill="hold" evtFilter="cancelBubble" nodeType="interactiveSeq">
+                <p:stCondLst>
+                  <p:cond evt="onClick" delay="0">
+                    <p:tgtEl>
+                      <p:spTgt spid="4"/>
+                    </p:tgtEl>
+                  </p:cond>
+                </p:stCondLst>
+                <p:endSync evt="end" delay="0">
+                  <p:rtn val="all"/>
+                </p:endSync>
+                <p:childTnLst>
+                  <p:par>
+                    <p:cTn id="9" fill="hold">
+                      <p:stCondLst>
+                        <p:cond delay="0"/>
+                      </p:stCondLst>
+                      <p:childTnLst>
+                        <p:par>
+                          <p:cTn id="10" fill="hold">
+                            <p:stCondLst>
+                              <p:cond delay="0"/>
+                            </p:stCondLst>
+                            <p:childTnLst>
+                              <p:par>
+                                <p:cTn id="11" presetID="2" presetClass="mediacall" presetSubtype="0" fill="hold" nodeType="clickEffect">
+                                  <p:stCondLst>
+                                    <p:cond delay="0"/>
+                                  </p:stCondLst>
+                                  <p:childTnLst>
+                                    <p:cmd type="call" cmd="togglePause">
+                                      <p:cBhvr>
+                                        <p:cTn id="12" dur="1" fill="hold"/>
+                                        <p:tgtEl>
+                                          <p:spTgt spid="4"/>
+                                        </p:tgtEl>
+                                      </p:cBhvr>
+                                    </p:cmd>
+                                  </p:childTnLst>
+                                </p:cTn>
+                              </p:par>
+                            </p:childTnLst>
+                          </p:cTn>
+                        </p:par>
+                      </p:childTnLst>
+                    </p:cTn>
+                  </p:par>
+                </p:childTnLst>
+              </p:cTn>
+              <p:nextCondLst>
+                <p:cond evt="onClick" delay="0">
+                  <p:tgtEl>
+                    <p:spTgt spid="4"/>
+                  </p:tgtEl>
+                </p:cond>
+              </p:nextCondLst>
+            </p:seq>
+          </p:childTnLst>
+        </p:cTn>
+      </p:par>
+    </p:tnLst>
+  </p:timing>
+</p:sld>
+</file>
+
+<file path=ppt/slides/slide20.xml><?xml version="1.0" encoding="utf-8"?>
 <p:sld xmlns:a="http://schemas.openxmlformats.org/drawingml/2006/main" xmlns:r="http://schemas.openxmlformats.org/officeDocument/2006/relationships" xmlns:p="http://schemas.openxmlformats.org/presentationml/2006/main">
   <p:cSld>
     <p:spTree>
@@ -32364,7 +33997,7 @@
 </p:sld>
 </file>
 
-<file path=ppt/slides/slide16.xml><?xml version="1.0" encoding="utf-8"?>
+<file path=ppt/slides/slide21.xml><?xml version="1.0" encoding="utf-8"?>
 <p:sld xmlns:a="http://schemas.openxmlformats.org/drawingml/2006/main" xmlns:r="http://schemas.openxmlformats.org/officeDocument/2006/relationships" xmlns:p="http://schemas.openxmlformats.org/presentationml/2006/main">
   <p:cSld>
     <p:bg>
@@ -32780,7 +34413,7 @@
 </p:sld>
 </file>
 
-<file path=ppt/slides/slide17.xml><?xml version="1.0" encoding="utf-8"?>
+<file path=ppt/slides/slide22.xml><?xml version="1.0" encoding="utf-8"?>
 <p:sld xmlns:a="http://schemas.openxmlformats.org/drawingml/2006/main" xmlns:r="http://schemas.openxmlformats.org/officeDocument/2006/relationships" xmlns:p="http://schemas.openxmlformats.org/presentationml/2006/main">
   <p:cSld>
     <p:bg>
@@ -33196,7 +34829,7 @@
 </p:sld>
 </file>
 
-<file path=ppt/slides/slide18.xml><?xml version="1.0" encoding="utf-8"?>
+<file path=ppt/slides/slide23.xml><?xml version="1.0" encoding="utf-8"?>
 <p:sld xmlns:a="http://schemas.openxmlformats.org/drawingml/2006/main" xmlns:r="http://schemas.openxmlformats.org/officeDocument/2006/relationships" xmlns:p="http://schemas.openxmlformats.org/presentationml/2006/main">
   <p:cSld>
     <p:bg>
@@ -35261,212 +36894,6 @@
 </p:sld>
 </file>
 
-<file path=ppt/slides/slide2.xml><?xml version="1.0" encoding="utf-8"?>
-<p:sld xmlns:a="http://schemas.openxmlformats.org/drawingml/2006/main" xmlns:r="http://schemas.openxmlformats.org/officeDocument/2006/relationships" xmlns:p="http://schemas.openxmlformats.org/presentationml/2006/main">
-  <p:cSld>
-    <p:spTree>
-      <p:nvGrpSpPr>
-        <p:cNvPr id="1" name=""/>
-        <p:cNvGrpSpPr/>
-        <p:nvPr/>
-      </p:nvGrpSpPr>
-      <p:grpSpPr>
-        <a:xfrm>
-          <a:off x="0" y="0"/>
-          <a:ext cx="0" cy="0"/>
-          <a:chOff x="0" y="0"/>
-          <a:chExt cx="0" cy="0"/>
-        </a:xfrm>
-      </p:grpSpPr>
-      <p:pic>
-        <p:nvPicPr>
-          <p:cNvPr id="4" name="WhatsApp Video 2026-09-29 at 11.23.01 PM">
-            <a:hlinkClick r:id="" action="ppaction://media"/>
-            <a:extLst>
-              <a:ext uri="{FF2B5EF4-FFF2-40B4-BE49-F238E27FC236}">
-                <a16:creationId xmlns:a16="http://schemas.microsoft.com/office/drawing/2014/main" id="{AC5FCED0-90CA-A7FC-B1CD-8FDE96EADE8D}"/>
-              </a:ext>
-            </a:extLst>
-          </p:cNvPr>
-          <p:cNvPicPr>
-            <a:picLocks noChangeAspect="1"/>
-          </p:cNvPicPr>
-          <p:nvPr>
-            <a:videoFile r:link="rId2"/>
-            <p:extLst>
-              <p:ext uri="{DAA4B4D4-6D71-4841-9C94-3DE7FCFB9230}">
-                <p14:media xmlns:p14="http://schemas.microsoft.com/office/powerpoint/2010/main" r:embed="rId1"/>
-              </p:ext>
-            </p:extLst>
-          </p:nvPr>
-        </p:nvPicPr>
-        <p:blipFill>
-          <a:blip r:embed="rId4"/>
-          <a:stretch>
-            <a:fillRect/>
-          </a:stretch>
-        </p:blipFill>
-        <p:spPr>
-          <a:xfrm>
-            <a:off x="3002059" y="57901"/>
-            <a:ext cx="6187881" cy="6676596"/>
-          </a:xfrm>
-          <a:prstGeom prst="rect">
-            <a:avLst/>
-          </a:prstGeom>
-        </p:spPr>
-      </p:pic>
-    </p:spTree>
-    <p:extLst>
-      <p:ext uri="{BB962C8B-B14F-4D97-AF65-F5344CB8AC3E}">
-        <p14:creationId xmlns:p14="http://schemas.microsoft.com/office/powerpoint/2010/main" val="3821943161"/>
-      </p:ext>
-    </p:extLst>
-  </p:cSld>
-  <p:clrMapOvr>
-    <a:masterClrMapping/>
-  </p:clrMapOvr>
-  <p:timing>
-    <p:tnLst>
-      <p:par>
-        <p:cTn id="1" dur="indefinite" restart="never" nodeType="tmRoot">
-          <p:childTnLst>
-            <p:seq concurrent="1" nextAc="seek">
-              <p:cTn id="2" dur="indefinite" nodeType="mainSeq">
-                <p:childTnLst>
-                  <p:par>
-                    <p:cTn id="3" fill="hold">
-                      <p:stCondLst>
-                        <p:cond delay="indefinite"/>
-                        <p:cond evt="onBegin" delay="0">
-                          <p:tn val="2"/>
-                        </p:cond>
-                      </p:stCondLst>
-                      <p:childTnLst>
-                        <p:par>
-                          <p:cTn id="4" fill="hold">
-                            <p:stCondLst>
-                              <p:cond delay="0"/>
-                            </p:stCondLst>
-                            <p:childTnLst>
-                              <p:par>
-                                <p:cTn id="5" presetID="1" presetClass="mediacall" presetSubtype="0" fill="hold" nodeType="afterEffect">
-                                  <p:stCondLst>
-                                    <p:cond delay="0"/>
-                                  </p:stCondLst>
-                                  <p:childTnLst>
-                                    <p:cmd type="call" cmd="playFrom(0.0)">
-                                      <p:cBhvr>
-                                        <p:cTn id="6" dur="30046" fill="hold"/>
-                                        <p:tgtEl>
-                                          <p:spTgt spid="4"/>
-                                        </p:tgtEl>
-                                      </p:cBhvr>
-                                    </p:cmd>
-                                  </p:childTnLst>
-                                </p:cTn>
-                              </p:par>
-                            </p:childTnLst>
-                          </p:cTn>
-                        </p:par>
-                      </p:childTnLst>
-                    </p:cTn>
-                  </p:par>
-                </p:childTnLst>
-              </p:cTn>
-              <p:prevCondLst>
-                <p:cond evt="onPrev" delay="0">
-                  <p:tgtEl>
-                    <p:sldTgt/>
-                  </p:tgtEl>
-                </p:cond>
-              </p:prevCondLst>
-              <p:nextCondLst>
-                <p:cond evt="onNext" delay="0">
-                  <p:tgtEl>
-                    <p:sldTgt/>
-                  </p:tgtEl>
-                </p:cond>
-              </p:nextCondLst>
-            </p:seq>
-            <p:video>
-              <p:cMediaNode vol="80000">
-                <p:cTn id="7" fill="hold" display="0">
-                  <p:stCondLst>
-                    <p:cond delay="indefinite"/>
-                  </p:stCondLst>
-                </p:cTn>
-                <p:tgtEl>
-                  <p:spTgt spid="4"/>
-                </p:tgtEl>
-              </p:cMediaNode>
-            </p:video>
-            <p:seq concurrent="1" nextAc="seek">
-              <p:cTn id="8" restart="whenNotActive" fill="hold" evtFilter="cancelBubble" nodeType="interactiveSeq">
-                <p:stCondLst>
-                  <p:cond evt="onClick" delay="0">
-                    <p:tgtEl>
-                      <p:spTgt spid="4"/>
-                    </p:tgtEl>
-                  </p:cond>
-                </p:stCondLst>
-                <p:endSync evt="end" delay="0">
-                  <p:rtn val="all"/>
-                </p:endSync>
-                <p:childTnLst>
-                  <p:par>
-                    <p:cTn id="9" fill="hold">
-                      <p:stCondLst>
-                        <p:cond delay="0"/>
-                      </p:stCondLst>
-                      <p:childTnLst>
-                        <p:par>
-                          <p:cTn id="10" fill="hold">
-                            <p:stCondLst>
-                              <p:cond delay="0"/>
-                            </p:stCondLst>
-                            <p:childTnLst>
-                              <p:par>
-                                <p:cTn id="11" presetID="2" presetClass="mediacall" presetSubtype="0" fill="hold" nodeType="clickEffect">
-                                  <p:stCondLst>
-                                    <p:cond delay="0"/>
-                                  </p:stCondLst>
-                                  <p:childTnLst>
-                                    <p:cmd type="call" cmd="togglePause">
-                                      <p:cBhvr>
-                                        <p:cTn id="12" dur="1" fill="hold"/>
-                                        <p:tgtEl>
-                                          <p:spTgt spid="4"/>
-                                        </p:tgtEl>
-                                      </p:cBhvr>
-                                    </p:cmd>
-                                  </p:childTnLst>
-                                </p:cTn>
-                              </p:par>
-                            </p:childTnLst>
-                          </p:cTn>
-                        </p:par>
-                      </p:childTnLst>
-                    </p:cTn>
-                  </p:par>
-                </p:childTnLst>
-              </p:cTn>
-              <p:nextCondLst>
-                <p:cond evt="onClick" delay="0">
-                  <p:tgtEl>
-                    <p:spTgt spid="4"/>
-                  </p:tgtEl>
-                </p:cond>
-              </p:nextCondLst>
-            </p:seq>
-          </p:childTnLst>
-        </p:cTn>
-      </p:par>
-    </p:tnLst>
-  </p:timing>
-</p:sld>
-</file>
-
 <file path=ppt/slides/slide3.xml><?xml version="1.0" encoding="utf-8"?>
 <p:sld xmlns:a="http://schemas.openxmlformats.org/drawingml/2006/main" xmlns:r="http://schemas.openxmlformats.org/officeDocument/2006/relationships" xmlns:p="http://schemas.openxmlformats.org/presentationml/2006/main">
   <p:cSld>
@@ -37039,14 +38466,6 @@
 <file path=ppt/slides/slide8.xml><?xml version="1.0" encoding="utf-8"?>
 <p:sld xmlns:a="http://schemas.openxmlformats.org/drawingml/2006/main" xmlns:r="http://schemas.openxmlformats.org/officeDocument/2006/relationships" xmlns:p="http://schemas.openxmlformats.org/presentationml/2006/main">
   <p:cSld>
-    <p:bg>
-      <p:bgPr>
-        <a:solidFill>
-          <a:schemeClr val="bg1"/>
-        </a:solidFill>
-        <a:effectLst/>
-      </p:bgPr>
-    </p:bg>
     <p:spTree>
       <p:nvGrpSpPr>
         <p:cNvPr id="1" name=""/>
@@ -37061,72 +38480,12 @@
           <a:chExt cx="0" cy="0"/>
         </a:xfrm>
       </p:grpSpPr>
-      <p:sp useBgFill="1">
-        <p:nvSpPr>
-          <p:cNvPr id="9" name="Slide Background">
+      <p:pic>
+        <p:nvPicPr>
+          <p:cNvPr id="4" name="Picture 3" descr="How to Choose the Best Microcontroller for Your Project | Xecor">
             <a:extLst>
               <a:ext uri="{FF2B5EF4-FFF2-40B4-BE49-F238E27FC236}">
-                <a16:creationId xmlns:a16="http://schemas.microsoft.com/office/drawing/2014/main" id="{3ECBE1F1-D69B-4AFA-ABD5-8E41720EF6DE}"/>
-              </a:ext>
-              <a:ext uri="{C183D7F6-B498-43B3-948B-1728B52AA6E4}">
-                <adec:decorative xmlns:adec="http://schemas.microsoft.com/office/drawing/2017/decorative" val="1"/>
-              </a:ext>
-            </a:extLst>
-          </p:cNvPr>
-          <p:cNvSpPr>
-            <a:spLocks noGrp="1" noRot="1" noChangeAspect="1" noMove="1" noResize="1" noEditPoints="1" noAdjustHandles="1" noChangeArrowheads="1" noChangeShapeType="1" noTextEdit="1"/>
-          </p:cNvSpPr>
-          <p:nvPr>
-            <p:extLst>
-              <p:ext uri="{386F3935-93C4-4BCD-93E2-E3B085C9AB24}">
-                <p16:designElem xmlns:p16="http://schemas.microsoft.com/office/powerpoint/2015/main" val="1"/>
-              </p:ext>
-            </p:extLst>
-          </p:nvPr>
-        </p:nvSpPr>
-        <p:spPr>
-          <a:xfrm>
-            <a:off x="0" y="0"/>
-            <a:ext cx="12192000" cy="6858000"/>
-          </a:xfrm>
-          <a:prstGeom prst="rect">
-            <a:avLst/>
-          </a:prstGeom>
-          <a:ln>
-            <a:noFill/>
-          </a:ln>
-        </p:spPr>
-        <p:style>
-          <a:lnRef idx="2">
-            <a:schemeClr val="accent1">
-              <a:shade val="50000"/>
-            </a:schemeClr>
-          </a:lnRef>
-          <a:fillRef idx="1">
-            <a:schemeClr val="accent1"/>
-          </a:fillRef>
-          <a:effectRef idx="0">
-            <a:schemeClr val="accent1"/>
-          </a:effectRef>
-          <a:fontRef idx="minor">
-            <a:schemeClr val="lt1"/>
-          </a:fontRef>
-        </p:style>
-        <p:txBody>
-          <a:bodyPr rtlCol="0" anchor="ctr"/>
-          <a:lstStyle/>
-          <a:p>
-            <a:pPr algn="ctr"/>
-            <a:endParaRPr lang="en-US"/>
-          </a:p>
-        </p:txBody>
-      </p:sp>
-      <p:pic>
-        <p:nvPicPr>
-          <p:cNvPr id="5" name="Picture 4" descr="Electronic circuit board with processor">
-            <a:extLst>
-              <a:ext uri="{FF2B5EF4-FFF2-40B4-BE49-F238E27FC236}">
-                <a16:creationId xmlns:a16="http://schemas.microsoft.com/office/drawing/2014/main" id="{15C5DD42-E6B4-45F5-AEF7-219505B31CA1}"/>
+                <a16:creationId xmlns:a16="http://schemas.microsoft.com/office/drawing/2014/main" id="{E8F656FD-7495-11F2-E0D6-F26D4A4AA1CE}"/>
               </a:ext>
             </a:extLst>
           </p:cNvPr>
@@ -37136,201 +38495,25 @@
           <p:nvPr/>
         </p:nvPicPr>
         <p:blipFill>
-          <a:blip r:embed="rId3"/>
-          <a:srcRect l="35694" r="11647" b="-2"/>
+          <a:blip r:embed="rId2"/>
           <a:stretch>
             <a:fillRect/>
           </a:stretch>
         </p:blipFill>
         <p:spPr>
           <a:xfrm>
-            <a:off x="-1" y="-2"/>
-            <a:ext cx="5410198" cy="6858002"/>
+            <a:off x="274198" y="981077"/>
+            <a:ext cx="11822443" cy="5084118"/>
           </a:xfrm>
           <a:prstGeom prst="rect">
             <a:avLst/>
           </a:prstGeom>
         </p:spPr>
       </p:pic>
-      <p:sp useBgFill="1">
-        <p:nvSpPr>
-          <p:cNvPr id="11" name="Rectangle 10">
-            <a:extLst>
-              <a:ext uri="{FF2B5EF4-FFF2-40B4-BE49-F238E27FC236}">
-                <a16:creationId xmlns:a16="http://schemas.microsoft.com/office/drawing/2014/main" id="{603A6265-E10C-4B85-9C20-E75FCAF9CC63}"/>
-              </a:ext>
-              <a:ext uri="{C183D7F6-B498-43B3-948B-1728B52AA6E4}">
-                <adec:decorative xmlns:adec="http://schemas.microsoft.com/office/drawing/2017/decorative" val="1"/>
-              </a:ext>
-            </a:extLst>
-          </p:cNvPr>
-          <p:cNvSpPr>
-            <a:spLocks noGrp="1" noRot="1" noChangeAspect="1" noMove="1" noResize="1" noEditPoints="1" noAdjustHandles="1" noChangeArrowheads="1" noChangeShapeType="1" noTextEdit="1"/>
-          </p:cNvSpPr>
-          <p:nvPr>
-            <p:extLst>
-              <p:ext uri="{386F3935-93C4-4BCD-93E2-E3B085C9AB24}">
-                <p16:designElem xmlns:p16="http://schemas.microsoft.com/office/powerpoint/2015/main" val="1"/>
-              </p:ext>
-            </p:extLst>
-          </p:nvPr>
-        </p:nvSpPr>
-        <p:spPr>
-          <a:xfrm>
-            <a:off x="5410197" y="-1"/>
-            <a:ext cx="6781802" cy="2286000"/>
-          </a:xfrm>
-          <a:prstGeom prst="rect">
-            <a:avLst/>
-          </a:prstGeom>
-          <a:ln>
-            <a:noFill/>
-          </a:ln>
-          <a:effectLst>
-            <a:outerShdw blurRad="355600" dist="152400" sx="95000" sy="95000" algn="t" rotWithShape="0">
-              <a:srgbClr val="000000">
-                <a:alpha val="29000"/>
-              </a:srgbClr>
-            </a:outerShdw>
-          </a:effectLst>
-        </p:spPr>
-        <p:style>
-          <a:lnRef idx="2">
-            <a:schemeClr val="accent1">
-              <a:shade val="50000"/>
-            </a:schemeClr>
-          </a:lnRef>
-          <a:fillRef idx="1">
-            <a:schemeClr val="accent1"/>
-          </a:fillRef>
-          <a:effectRef idx="0">
-            <a:schemeClr val="accent1"/>
-          </a:effectRef>
-          <a:fontRef idx="minor">
-            <a:schemeClr val="lt1"/>
-          </a:fontRef>
-        </p:style>
-        <p:txBody>
-          <a:bodyPr rtlCol="0" anchor="ctr"/>
-          <a:lstStyle/>
-          <a:p>
-            <a:pPr algn="ctr"/>
-            <a:endParaRPr lang="en-US"/>
-          </a:p>
-        </p:txBody>
-      </p:sp>
-      <p:sp>
-        <p:nvSpPr>
-          <p:cNvPr id="2" name="Title 1">
-            <a:extLst>
-              <a:ext uri="{FF2B5EF4-FFF2-40B4-BE49-F238E27FC236}">
-                <a16:creationId xmlns:a16="http://schemas.microsoft.com/office/drawing/2014/main" id="{7BBFBE35-9AB0-EF5D-E279-A82FBB4988D4}"/>
-              </a:ext>
-            </a:extLst>
-          </p:cNvPr>
-          <p:cNvSpPr>
-            <a:spLocks noGrp="1"/>
-          </p:cNvSpPr>
-          <p:nvPr>
-            <p:ph type="title"/>
-          </p:nvPr>
-        </p:nvSpPr>
-        <p:spPr>
-          <a:xfrm>
-            <a:off x="6115317" y="405685"/>
-            <a:ext cx="5464968" cy="1559301"/>
-          </a:xfrm>
-        </p:spPr>
-        <p:txBody>
-          <a:bodyPr>
-            <a:normAutofit/>
-          </a:bodyPr>
-          <a:lstStyle/>
-          <a:p>
-            <a:r>
-              <a:rPr lang="en-AE" sz="4000" b="1"/>
-              <a:t>Arduino Uno as a Learning Platform</a:t>
-            </a:r>
-            <a:endParaRPr lang="en-AE" sz="4000"/>
-          </a:p>
-        </p:txBody>
-      </p:sp>
-      <p:sp>
-        <p:nvSpPr>
-          <p:cNvPr id="17" name="Content Placeholder 2">
-            <a:extLst>
-              <a:ext uri="{FF2B5EF4-FFF2-40B4-BE49-F238E27FC236}">
-                <a16:creationId xmlns:a16="http://schemas.microsoft.com/office/drawing/2014/main" id="{767927EB-D8F0-DD4F-6DB1-C234C289F9E9}"/>
-              </a:ext>
-            </a:extLst>
-          </p:cNvPr>
-          <p:cNvSpPr>
-            <a:spLocks noGrp="1"/>
-          </p:cNvSpPr>
-          <p:nvPr>
-            <p:ph idx="1"/>
-          </p:nvPr>
-        </p:nvSpPr>
-        <p:spPr>
-          <a:xfrm>
-            <a:off x="6115317" y="2743200"/>
-            <a:ext cx="5247340" cy="3496878"/>
-          </a:xfrm>
-        </p:spPr>
-        <p:txBody>
-          <a:bodyPr anchor="ctr">
-            <a:normAutofit/>
-          </a:bodyPr>
-          <a:lstStyle/>
-          <a:p>
-            <a:pPr lvl="0"/>
-            <a:r>
-              <a:rPr lang="en-AE" sz="2000" dirty="0"/>
-              <a:t>Microcontroller: ATmega328P.</a:t>
-            </a:r>
-          </a:p>
-          <a:p>
-            <a:pPr lvl="0"/>
-            <a:r>
-              <a:rPr lang="en-AE" sz="2000" dirty="0"/>
-              <a:t>Digital pins: read or write HIGH/LOW states.</a:t>
-            </a:r>
-          </a:p>
-          <a:p>
-            <a:pPr lvl="0"/>
-            <a:r>
-              <a:rPr lang="en-AE" sz="2000" dirty="0"/>
-              <a:t>Analogue pins: measure a varying voltage with </a:t>
-            </a:r>
-            <a:r>
-              <a:rPr lang="en-AE" sz="2000" dirty="0" err="1"/>
-              <a:t>analogRead</a:t>
-            </a:r>
-            <a:r>
-              <a:rPr lang="en-AE" sz="2000" dirty="0"/>
-              <a:t>().</a:t>
-            </a:r>
-          </a:p>
-          <a:p>
-            <a:pPr lvl="0"/>
-            <a:r>
-              <a:rPr lang="en-AE" sz="2000" dirty="0"/>
-              <a:t>USB connection: uploads the sketch and provides serial debugging.</a:t>
-            </a:r>
-          </a:p>
-          <a:p>
-            <a:pPr lvl="0"/>
-            <a:r>
-              <a:rPr lang="en-AE" sz="2000" dirty="0"/>
-              <a:t>It is simple enough for first programs and supports the project pattern directly.</a:t>
-            </a:r>
-          </a:p>
-        </p:txBody>
-      </p:sp>
     </p:spTree>
     <p:extLst>
       <p:ext uri="{BB962C8B-B14F-4D97-AF65-F5344CB8AC3E}">
-        <p14:creationId xmlns:p14="http://schemas.microsoft.com/office/powerpoint/2010/main" val="508049359"/>
+        <p14:creationId xmlns:p14="http://schemas.microsoft.com/office/powerpoint/2010/main" val="2275508236"/>
       </p:ext>
     </p:extLst>
   </p:cSld>
@@ -37357,333 +38540,40 @@
           <a:chExt cx="0" cy="0"/>
         </a:xfrm>
       </p:grpSpPr>
-      <p:sp>
-        <p:nvSpPr>
-          <p:cNvPr id="2" name="Title 1">
+      <p:pic>
+        <p:nvPicPr>
+          <p:cNvPr id="4" name="Picture 3" descr="Development boards | STM32-base project">
             <a:extLst>
               <a:ext uri="{FF2B5EF4-FFF2-40B4-BE49-F238E27FC236}">
-                <a16:creationId xmlns:a16="http://schemas.microsoft.com/office/drawing/2014/main" id="{55D1F48A-637A-F07D-3489-3D9C150C7833}"/>
+                <a16:creationId xmlns:a16="http://schemas.microsoft.com/office/drawing/2014/main" id="{9FD51004-D6C0-5464-D79A-374C4F0D37BC}"/>
               </a:ext>
             </a:extLst>
           </p:cNvPr>
-          <p:cNvSpPr>
-            <a:spLocks noGrp="1"/>
-          </p:cNvSpPr>
-          <p:nvPr>
-            <p:ph type="title"/>
-          </p:nvPr>
-        </p:nvSpPr>
-        <p:spPr/>
-        <p:txBody>
-          <a:bodyPr/>
-          <a:lstStyle/>
-          <a:p>
-            <a:r>
-              <a:rPr lang="en-AE" b="1" dirty="0" err="1"/>
-              <a:t>Tinkercad</a:t>
-            </a:r>
-            <a:r>
-              <a:rPr lang="en-AE" b="1" dirty="0"/>
-              <a:t> and </a:t>
-            </a:r>
-            <a:r>
-              <a:rPr lang="en-AE" b="1" dirty="0" err="1"/>
-              <a:t>Wokwi</a:t>
-            </a:r>
-            <a:endParaRPr lang="en-AE" dirty="0"/>
-          </a:p>
-        </p:txBody>
-      </p:sp>
-      <p:graphicFrame>
-        <p:nvGraphicFramePr>
-          <p:cNvPr id="4" name="Content Placeholder 3">
-            <a:extLst>
-              <a:ext uri="{FF2B5EF4-FFF2-40B4-BE49-F238E27FC236}">
-                <a16:creationId xmlns:a16="http://schemas.microsoft.com/office/drawing/2014/main" id="{012627D5-737E-3042-8E99-1C6D382D3F30}"/>
-              </a:ext>
-            </a:extLst>
-          </p:cNvPr>
-          <p:cNvGraphicFramePr>
-            <a:graphicFrameLocks noGrp="1"/>
-          </p:cNvGraphicFramePr>
-          <p:nvPr>
-            <p:ph idx="1"/>
-            <p:extLst>
-              <p:ext uri="{D42A27DB-BD31-4B8C-83A1-F6EECF244321}">
-                <p14:modId xmlns:p14="http://schemas.microsoft.com/office/powerpoint/2010/main" val="3973948190"/>
-              </p:ext>
-            </p:extLst>
-          </p:nvPr>
-        </p:nvGraphicFramePr>
-        <p:xfrm>
-          <a:off x="933763" y="1580584"/>
-          <a:ext cx="10360050" cy="2390502"/>
-        </p:xfrm>
-        <a:graphic>
-          <a:graphicData uri="http://schemas.openxmlformats.org/drawingml/2006/table">
-            <a:tbl>
-              <a:tblPr>
-                <a:tableStyleId>{5C22544A-7EE6-4342-B048-85BDC9FD1C3A}</a:tableStyleId>
-              </a:tblPr>
-              <a:tblGrid>
-                <a:gridCol w="5180025">
-                  <a:extLst>
-                    <a:ext uri="{9D8B030D-6E8A-4147-A177-3AD203B41FA5}">
-                      <a16:colId xmlns:a16="http://schemas.microsoft.com/office/drawing/2014/main" val="1620892121"/>
-                    </a:ext>
-                  </a:extLst>
-                </a:gridCol>
-                <a:gridCol w="5180025">
-                  <a:extLst>
-                    <a:ext uri="{9D8B030D-6E8A-4147-A177-3AD203B41FA5}">
-                      <a16:colId xmlns:a16="http://schemas.microsoft.com/office/drawing/2014/main" val="3357143267"/>
-                    </a:ext>
-                  </a:extLst>
-                </a:gridCol>
-              </a:tblGrid>
-              <a:tr h="302002">
-                <a:tc>
-                  <a:txBody>
-                    <a:bodyPr/>
-                    <a:lstStyle/>
-                    <a:p>
-                      <a:pPr marL="0" marR="0" algn="l" latinLnBrk="0">
-                        <a:spcBef>
-                          <a:spcPts val="750"/>
-                        </a:spcBef>
-                        <a:spcAft>
-                          <a:spcPts val="1125"/>
-                        </a:spcAft>
-                        <a:buNone/>
-                      </a:pPr>
-                      <a:r>
-                        <a:rPr lang="en-AE" sz="2400">
-                          <a:effectLst/>
-                        </a:rPr>
-                        <a:t>Tool</a:t>
-                      </a:r>
-                      <a:endParaRPr lang="en-AE" sz="2400" b="1" i="0">
-                        <a:solidFill>
-                          <a:srgbClr val="000000"/>
-                        </a:solidFill>
-                        <a:effectLst/>
-                        <a:latin typeface="Helvetica Neue"/>
-                      </a:endParaRPr>
-                    </a:p>
-                  </a:txBody>
-                  <a:tcPr marL="70757" marR="70757" marT="32657" marB="32657" anchor="ctr"/>
-                </a:tc>
-                <a:tc>
-                  <a:txBody>
-                    <a:bodyPr/>
-                    <a:lstStyle/>
-                    <a:p>
-                      <a:pPr marL="0" marR="0" algn="l" latinLnBrk="0">
-                        <a:spcBef>
-                          <a:spcPts val="750"/>
-                        </a:spcBef>
-                        <a:spcAft>
-                          <a:spcPts val="1125"/>
-                        </a:spcAft>
-                        <a:buNone/>
-                      </a:pPr>
-                      <a:r>
-                        <a:rPr lang="en-AE" sz="2400">
-                          <a:effectLst/>
-                        </a:rPr>
-                        <a:t>Use it for</a:t>
-                      </a:r>
-                      <a:endParaRPr lang="en-AE" sz="2400" b="1" i="0">
-                        <a:solidFill>
-                          <a:srgbClr val="000000"/>
-                        </a:solidFill>
-                        <a:effectLst/>
-                        <a:latin typeface="Helvetica Neue"/>
-                      </a:endParaRPr>
-                    </a:p>
-                  </a:txBody>
-                  <a:tcPr marL="70757" marR="70757" marT="32657" marB="32657" anchor="ctr"/>
-                </a:tc>
-                <a:extLst>
-                  <a:ext uri="{0D108BD9-81ED-4DB2-BD59-A6C34878D82A}">
-                    <a16:rowId xmlns:a16="http://schemas.microsoft.com/office/drawing/2014/main" val="2858171412"/>
-                  </a:ext>
-                </a:extLst>
-              </a:tr>
-              <a:tr h="747059">
-                <a:tc>
-                  <a:txBody>
-                    <a:bodyPr/>
-                    <a:lstStyle/>
-                    <a:p>
-                      <a:pPr marL="0" marR="0" algn="l" latinLnBrk="0">
-                        <a:spcBef>
-                          <a:spcPts val="750"/>
-                        </a:spcBef>
-                        <a:spcAft>
-                          <a:spcPts val="1125"/>
-                        </a:spcAft>
-                        <a:buNone/>
-                      </a:pPr>
-                      <a:r>
-                        <a:rPr lang="en-AE" sz="2400">
-                          <a:effectLst/>
-                        </a:rPr>
-                        <a:t>Tinkercad Circuits</a:t>
-                      </a:r>
-                      <a:endParaRPr lang="en-AE" sz="2400" b="0" i="0">
-                        <a:solidFill>
-                          <a:srgbClr val="333333"/>
-                        </a:solidFill>
-                        <a:effectLst/>
-                        <a:latin typeface="Helvetica Neue"/>
-                      </a:endParaRPr>
-                    </a:p>
-                  </a:txBody>
-                  <a:tcPr marL="70757" marR="70757" marT="32657" marB="32657" anchor="ctr"/>
-                </a:tc>
-                <a:tc>
-                  <a:txBody>
-                    <a:bodyPr/>
-                    <a:lstStyle/>
-                    <a:p>
-                      <a:pPr marL="0" marR="0" algn="l" latinLnBrk="0">
-                        <a:spcBef>
-                          <a:spcPts val="750"/>
-                        </a:spcBef>
-                        <a:spcAft>
-                          <a:spcPts val="1125"/>
-                        </a:spcAft>
-                        <a:buNone/>
-                      </a:pPr>
-                      <a:r>
-                        <a:rPr lang="en-AE" sz="2400">
-                          <a:effectLst/>
-                        </a:rPr>
-                        <a:t>First circuits, Arduino Uno, LEDs, buttons, LDRs and beginner code</a:t>
-                      </a:r>
-                      <a:endParaRPr lang="en-AE" sz="2400" b="0" i="0">
-                        <a:solidFill>
-                          <a:srgbClr val="333333"/>
-                        </a:solidFill>
-                        <a:effectLst/>
-                        <a:latin typeface="Helvetica Neue"/>
-                      </a:endParaRPr>
-                    </a:p>
-                  </a:txBody>
-                  <a:tcPr marL="70757" marR="70757" marT="32657" marB="32657" anchor="ctr"/>
-                </a:tc>
-                <a:extLst>
-                  <a:ext uri="{0D108BD9-81ED-4DB2-BD59-A6C34878D82A}">
-                    <a16:rowId xmlns:a16="http://schemas.microsoft.com/office/drawing/2014/main" val="595171112"/>
-                  </a:ext>
-                </a:extLst>
-              </a:tr>
-              <a:tr h="969587">
-                <a:tc>
-                  <a:txBody>
-                    <a:bodyPr/>
-                    <a:lstStyle/>
-                    <a:p>
-                      <a:pPr marL="0" marR="0" algn="l" latinLnBrk="0">
-                        <a:spcBef>
-                          <a:spcPts val="750"/>
-                        </a:spcBef>
-                        <a:spcAft>
-                          <a:spcPts val="1125"/>
-                        </a:spcAft>
-                        <a:buNone/>
-                      </a:pPr>
-                      <a:r>
-                        <a:rPr lang="en-AE" sz="2400">
-                          <a:effectLst/>
-                        </a:rPr>
-                        <a:t>Wokwi</a:t>
-                      </a:r>
-                      <a:endParaRPr lang="en-AE" sz="2400" b="0" i="0">
-                        <a:solidFill>
-                          <a:srgbClr val="333333"/>
-                        </a:solidFill>
-                        <a:effectLst/>
-                        <a:latin typeface="Helvetica Neue"/>
-                      </a:endParaRPr>
-                    </a:p>
-                  </a:txBody>
-                  <a:tcPr marL="70757" marR="70757" marT="32657" marB="32657" anchor="ctr"/>
-                </a:tc>
-                <a:tc>
-                  <a:txBody>
-                    <a:bodyPr/>
-                    <a:lstStyle/>
-                    <a:p>
-                      <a:pPr marL="0" marR="0" algn="l" latinLnBrk="0">
-                        <a:spcBef>
-                          <a:spcPts val="750"/>
-                        </a:spcBef>
-                        <a:spcAft>
-                          <a:spcPts val="1125"/>
-                        </a:spcAft>
-                        <a:buNone/>
-                      </a:pPr>
-                      <a:r>
-                        <a:rPr lang="en-AE" sz="2400" dirty="0">
-                          <a:effectLst/>
-                        </a:rPr>
-                        <a:t>I2C LCD, ESP32 extensions, serial monitor and shareable advanced simulations</a:t>
-                      </a:r>
-                      <a:endParaRPr lang="en-AE" sz="2400" b="0" i="0" dirty="0">
-                        <a:solidFill>
-                          <a:srgbClr val="333333"/>
-                        </a:solidFill>
-                        <a:effectLst/>
-                        <a:latin typeface="Helvetica Neue"/>
-                      </a:endParaRPr>
-                    </a:p>
-                  </a:txBody>
-                  <a:tcPr marL="70757" marR="70757" marT="32657" marB="32657" anchor="ctr"/>
-                </a:tc>
-                <a:extLst>
-                  <a:ext uri="{0D108BD9-81ED-4DB2-BD59-A6C34878D82A}">
-                    <a16:rowId xmlns:a16="http://schemas.microsoft.com/office/drawing/2014/main" val="1640238490"/>
-                  </a:ext>
-                </a:extLst>
-              </a:tr>
-            </a:tbl>
-          </a:graphicData>
-        </a:graphic>
-      </p:graphicFrame>
-      <p:graphicFrame>
-        <p:nvGraphicFramePr>
-          <p:cNvPr id="8" name="TextBox 5">
-            <a:extLst>
-              <a:ext uri="{FF2B5EF4-FFF2-40B4-BE49-F238E27FC236}">
-                <a16:creationId xmlns:a16="http://schemas.microsoft.com/office/drawing/2014/main" id="{25CCC8B4-1B80-1879-031B-601CBD88F8B3}"/>
-              </a:ext>
-            </a:extLst>
-          </p:cNvPr>
-          <p:cNvGraphicFramePr/>
-          <p:nvPr>
-            <p:extLst>
-              <p:ext uri="{D42A27DB-BD31-4B8C-83A1-F6EECF244321}">
-                <p14:modId xmlns:p14="http://schemas.microsoft.com/office/powerpoint/2010/main" val="2717375173"/>
-              </p:ext>
-            </p:extLst>
-          </p:nvPr>
-        </p:nvGraphicFramePr>
-        <p:xfrm>
-          <a:off x="838200" y="4333515"/>
-          <a:ext cx="10360049" cy="2123658"/>
-        </p:xfrm>
-        <a:graphic>
-          <a:graphicData uri="http://schemas.openxmlformats.org/drawingml/2006/diagram">
-            <dgm:relIds xmlns:dgm="http://schemas.openxmlformats.org/drawingml/2006/diagram" xmlns:r="http://schemas.openxmlformats.org/officeDocument/2006/relationships" r:dm="rId3" r:lo="rId4" r:qs="rId5" r:cs="rId6"/>
-          </a:graphicData>
-        </a:graphic>
-      </p:graphicFrame>
+          <p:cNvPicPr>
+            <a:picLocks noChangeAspect="1"/>
+          </p:cNvPicPr>
+          <p:nvPr/>
+        </p:nvPicPr>
+        <p:blipFill>
+          <a:blip r:embed="rId2"/>
+          <a:stretch>
+            <a:fillRect/>
+          </a:stretch>
+        </p:blipFill>
+        <p:spPr>
+          <a:xfrm>
+            <a:off x="1123544" y="87549"/>
+            <a:ext cx="10024353" cy="6682902"/>
+          </a:xfrm>
+          <a:prstGeom prst="rect">
+            <a:avLst/>
+          </a:prstGeom>
+        </p:spPr>
+      </p:pic>
     </p:spTree>
     <p:extLst>
       <p:ext uri="{BB962C8B-B14F-4D97-AF65-F5344CB8AC3E}">
-        <p14:creationId xmlns:p14="http://schemas.microsoft.com/office/powerpoint/2010/main" val="3422727164"/>
+        <p14:creationId xmlns:p14="http://schemas.microsoft.com/office/powerpoint/2010/main" val="1947377777"/>
       </p:ext>
     </p:extLst>
   </p:cSld>
